--- a/tics.pptx
+++ b/tics.pptx
@@ -5,9 +5,11 @@
     <p:sldMasterId id="2147483648" r:id="rId1"/>
   </p:sldMasterIdLst>
   <p:sldIdLst>
-    <p:sldId id="256" r:id="rId2"/>
-    <p:sldId id="258" r:id="rId3"/>
-    <p:sldId id="257" r:id="rId4"/>
+    <p:sldId id="260" r:id="rId2"/>
+    <p:sldId id="256" r:id="rId3"/>
+    <p:sldId id="259" r:id="rId4"/>
+    <p:sldId id="258" r:id="rId5"/>
+    <p:sldId id="257" r:id="rId6"/>
   </p:sldIdLst>
   <p:sldSz cx="12192000" cy="6858000"/>
   <p:notesSz cx="6858000" cy="9144000"/>
@@ -263,7 +265,7 @@
           <a:p>
             <a:fld id="{B8AD9B42-5818-4541-9667-91B0E0B30851}" type="datetimeFigureOut">
               <a:rPr lang="en-US" smtClean="0"/>
-              <a:t>3/21/2026</a:t>
+              <a:t>3/26/2026</a:t>
             </a:fld>
             <a:endParaRPr lang="en-US"/>
           </a:p>
@@ -495,7 +497,7 @@
           <a:p>
             <a:fld id="{B8AD9B42-5818-4541-9667-91B0E0B30851}" type="datetimeFigureOut">
               <a:rPr lang="en-US" smtClean="0"/>
-              <a:t>3/21/2026</a:t>
+              <a:t>3/26/2026</a:t>
             </a:fld>
             <a:endParaRPr lang="en-US"/>
           </a:p>
@@ -737,7 +739,7 @@
           <a:p>
             <a:fld id="{B8AD9B42-5818-4541-9667-91B0E0B30851}" type="datetimeFigureOut">
               <a:rPr lang="en-US" smtClean="0"/>
-              <a:t>3/21/2026</a:t>
+              <a:t>3/26/2026</a:t>
             </a:fld>
             <a:endParaRPr lang="en-US"/>
           </a:p>
@@ -969,7 +971,7 @@
           <a:p>
             <a:fld id="{B8AD9B42-5818-4541-9667-91B0E0B30851}" type="datetimeFigureOut">
               <a:rPr lang="en-US" smtClean="0"/>
-              <a:t>3/21/2026</a:t>
+              <a:t>3/26/2026</a:t>
             </a:fld>
             <a:endParaRPr lang="en-US"/>
           </a:p>
@@ -1245,7 +1247,7 @@
           <a:p>
             <a:fld id="{B8AD9B42-5818-4541-9667-91B0E0B30851}" type="datetimeFigureOut">
               <a:rPr lang="en-US" smtClean="0"/>
-              <a:t>3/21/2026</a:t>
+              <a:t>3/26/2026</a:t>
             </a:fld>
             <a:endParaRPr lang="en-US"/>
           </a:p>
@@ -1577,7 +1579,7 @@
           <a:p>
             <a:fld id="{B8AD9B42-5818-4541-9667-91B0E0B30851}" type="datetimeFigureOut">
               <a:rPr lang="en-US" smtClean="0"/>
-              <a:t>3/21/2026</a:t>
+              <a:t>3/26/2026</a:t>
             </a:fld>
             <a:endParaRPr lang="en-US"/>
           </a:p>
@@ -2056,7 +2058,7 @@
           <a:p>
             <a:fld id="{B8AD9B42-5818-4541-9667-91B0E0B30851}" type="datetimeFigureOut">
               <a:rPr lang="en-US" smtClean="0"/>
-              <a:t>3/21/2026</a:t>
+              <a:t>3/26/2026</a:t>
             </a:fld>
             <a:endParaRPr lang="en-US"/>
           </a:p>
@@ -2198,7 +2200,7 @@
           <a:p>
             <a:fld id="{B8AD9B42-5818-4541-9667-91B0E0B30851}" type="datetimeFigureOut">
               <a:rPr lang="en-US" smtClean="0"/>
-              <a:t>3/21/2026</a:t>
+              <a:t>3/26/2026</a:t>
             </a:fld>
             <a:endParaRPr lang="en-US"/>
           </a:p>
@@ -2311,7 +2313,7 @@
           <a:p>
             <a:fld id="{B8AD9B42-5818-4541-9667-91B0E0B30851}" type="datetimeFigureOut">
               <a:rPr lang="en-US" smtClean="0"/>
-              <a:t>3/21/2026</a:t>
+              <a:t>3/26/2026</a:t>
             </a:fld>
             <a:endParaRPr lang="en-US"/>
           </a:p>
@@ -2656,7 +2658,7 @@
           <a:p>
             <a:fld id="{B8AD9B42-5818-4541-9667-91B0E0B30851}" type="datetimeFigureOut">
               <a:rPr lang="en-US" smtClean="0"/>
-              <a:t>3/21/2026</a:t>
+              <a:t>3/26/2026</a:t>
             </a:fld>
             <a:endParaRPr lang="en-US"/>
           </a:p>
@@ -2945,7 +2947,7 @@
           <a:p>
             <a:fld id="{B8AD9B42-5818-4541-9667-91B0E0B30851}" type="datetimeFigureOut">
               <a:rPr lang="en-US" smtClean="0"/>
-              <a:t>3/21/2026</a:t>
+              <a:t>3/26/2026</a:t>
             </a:fld>
             <a:endParaRPr lang="en-US"/>
           </a:p>
@@ -3220,7 +3222,7 @@
           <a:p>
             <a:fld id="{B8AD9B42-5818-4541-9667-91B0E0B30851}" type="datetimeFigureOut">
               <a:rPr lang="en-US" smtClean="0"/>
-              <a:t>3/21/2026</a:t>
+              <a:t>3/26/2026</a:t>
             </a:fld>
             <a:endParaRPr lang="en-US"/>
           </a:p>
@@ -3625,6 +3627,379 @@
   <p:cSld>
     <p:spTree>
       <p:nvGrpSpPr>
+        <p:cNvPr id="1" name="">
+          <a:extLst>
+            <a:ext uri="{FF2B5EF4-FFF2-40B4-BE49-F238E27FC236}">
+              <a16:creationId xmlns:a16="http://schemas.microsoft.com/office/drawing/2014/main" id="{BB8F9E39-46BD-89B6-D29E-F50ACE364343}"/>
+            </a:ext>
+          </a:extLst>
+        </p:cNvPr>
+        <p:cNvGrpSpPr/>
+        <p:nvPr/>
+      </p:nvGrpSpPr>
+      <p:grpSpPr>
+        <a:xfrm>
+          <a:off x="0" y="0"/>
+          <a:ext cx="0" cy="0"/>
+          <a:chOff x="0" y="0"/>
+          <a:chExt cx="0" cy="0"/>
+        </a:xfrm>
+      </p:grpSpPr>
+      <p:pic>
+        <p:nvPicPr>
+          <p:cNvPr id="10" name="図 9">
+            <a:extLst>
+              <a:ext uri="{FF2B5EF4-FFF2-40B4-BE49-F238E27FC236}">
+                <a16:creationId xmlns:a16="http://schemas.microsoft.com/office/drawing/2014/main" id="{3090E142-3308-C150-2ED6-82ACDDBDC1B8}"/>
+              </a:ext>
+            </a:extLst>
+          </p:cNvPr>
+          <p:cNvPicPr>
+            <a:picLocks noChangeAspect="1"/>
+          </p:cNvPicPr>
+          <p:nvPr/>
+        </p:nvPicPr>
+        <p:blipFill>
+          <a:blip r:embed="rId2"/>
+          <a:srcRect b="49124"/>
+          <a:stretch>
+            <a:fillRect/>
+          </a:stretch>
+        </p:blipFill>
+        <p:spPr>
+          <a:xfrm>
+            <a:off x="0" y="10681"/>
+            <a:ext cx="12192000" cy="1860848"/>
+          </a:xfrm>
+          <a:prstGeom prst="rect">
+            <a:avLst/>
+          </a:prstGeom>
+        </p:spPr>
+      </p:pic>
+      <p:sp>
+        <p:nvSpPr>
+          <p:cNvPr id="8" name="テキスト ボックス 7">
+            <a:extLst>
+              <a:ext uri="{FF2B5EF4-FFF2-40B4-BE49-F238E27FC236}">
+                <a16:creationId xmlns:a16="http://schemas.microsoft.com/office/drawing/2014/main" id="{CF6FCF1D-82E4-4286-3CD8-CE013757DC89}"/>
+              </a:ext>
+            </a:extLst>
+          </p:cNvPr>
+          <p:cNvSpPr txBox="1"/>
+          <p:nvPr/>
+        </p:nvSpPr>
+        <p:spPr>
+          <a:xfrm>
+            <a:off x="85814" y="7526"/>
+            <a:ext cx="440960" cy="323165"/>
+          </a:xfrm>
+          <a:prstGeom prst="rect">
+            <a:avLst/>
+          </a:prstGeom>
+          <a:noFill/>
+        </p:spPr>
+        <p:txBody>
+          <a:bodyPr wrap="square" rtlCol="0">
+            <a:spAutoFit/>
+          </a:bodyPr>
+          <a:lstStyle/>
+          <a:p>
+            <a:r>
+              <a:rPr lang="en-US" sz="1500" b="1" dirty="0"/>
+              <a:t>(a)</a:t>
+            </a:r>
+          </a:p>
+        </p:txBody>
+      </p:sp>
+      <p:sp>
+        <p:nvSpPr>
+          <p:cNvPr id="9" name="テキスト ボックス 8">
+            <a:extLst>
+              <a:ext uri="{FF2B5EF4-FFF2-40B4-BE49-F238E27FC236}">
+                <a16:creationId xmlns:a16="http://schemas.microsoft.com/office/drawing/2014/main" id="{8219BDCD-48C6-1B95-ED30-4098FDF2E5C8}"/>
+              </a:ext>
+            </a:extLst>
+          </p:cNvPr>
+          <p:cNvSpPr txBox="1"/>
+          <p:nvPr/>
+        </p:nvSpPr>
+        <p:spPr>
+          <a:xfrm>
+            <a:off x="72949" y="1936878"/>
+            <a:ext cx="440960" cy="323165"/>
+          </a:xfrm>
+          <a:prstGeom prst="rect">
+            <a:avLst/>
+          </a:prstGeom>
+          <a:noFill/>
+        </p:spPr>
+        <p:txBody>
+          <a:bodyPr wrap="square" rtlCol="0">
+            <a:spAutoFit/>
+          </a:bodyPr>
+          <a:lstStyle/>
+          <a:p>
+            <a:r>
+              <a:rPr lang="en-US" sz="1500" b="1" dirty="0"/>
+              <a:t>(b)</a:t>
+            </a:r>
+          </a:p>
+        </p:txBody>
+      </p:sp>
+      <p:pic>
+        <p:nvPicPr>
+          <p:cNvPr id="12" name="図 11">
+            <a:extLst>
+              <a:ext uri="{FF2B5EF4-FFF2-40B4-BE49-F238E27FC236}">
+                <a16:creationId xmlns:a16="http://schemas.microsoft.com/office/drawing/2014/main" id="{CAC4A9BD-F1D7-8423-8890-429B07CE8EB4}"/>
+              </a:ext>
+            </a:extLst>
+          </p:cNvPr>
+          <p:cNvPicPr>
+            <a:picLocks noChangeAspect="1"/>
+          </p:cNvPicPr>
+          <p:nvPr/>
+        </p:nvPicPr>
+        <p:blipFill>
+          <a:blip r:embed="rId3"/>
+          <a:srcRect t="7263" r="49653" b="9185"/>
+          <a:stretch>
+            <a:fillRect/>
+          </a:stretch>
+        </p:blipFill>
+        <p:spPr>
+          <a:xfrm>
+            <a:off x="2534994" y="2678329"/>
+            <a:ext cx="1139962" cy="945884"/>
+          </a:xfrm>
+          <a:prstGeom prst="rect">
+            <a:avLst/>
+          </a:prstGeom>
+        </p:spPr>
+      </p:pic>
+      <p:sp>
+        <p:nvSpPr>
+          <p:cNvPr id="13" name="テキスト ボックス 12">
+            <a:extLst>
+              <a:ext uri="{FF2B5EF4-FFF2-40B4-BE49-F238E27FC236}">
+                <a16:creationId xmlns:a16="http://schemas.microsoft.com/office/drawing/2014/main" id="{70ADCC3B-B334-A2CE-5A45-84F05B0DC796}"/>
+              </a:ext>
+            </a:extLst>
+          </p:cNvPr>
+          <p:cNvSpPr txBox="1"/>
+          <p:nvPr/>
+        </p:nvSpPr>
+        <p:spPr>
+          <a:xfrm>
+            <a:off x="2472545" y="2236340"/>
+            <a:ext cx="1379330" cy="492443"/>
+          </a:xfrm>
+          <a:prstGeom prst="rect">
+            <a:avLst/>
+          </a:prstGeom>
+          <a:noFill/>
+        </p:spPr>
+        <p:txBody>
+          <a:bodyPr wrap="square" rtlCol="0">
+            <a:spAutoFit/>
+          </a:bodyPr>
+          <a:lstStyle/>
+          <a:p>
+            <a:pPr algn="ctr"/>
+            <a:r>
+              <a:rPr lang="en-US" sz="1300" dirty="0">
+                <a:latin typeface="Arial" panose="020B0604020202020204" pitchFamily="34" charset="0"/>
+                <a:cs typeface="Arial" panose="020B0604020202020204" pitchFamily="34" charset="0"/>
+              </a:rPr>
+              <a:t>high confidence</a:t>
+            </a:r>
+            <a:br>
+              <a:rPr lang="en-US" sz="1300" dirty="0">
+                <a:latin typeface="Arial" panose="020B0604020202020204" pitchFamily="34" charset="0"/>
+                <a:cs typeface="Arial" panose="020B0604020202020204" pitchFamily="34" charset="0"/>
+              </a:rPr>
+            </a:br>
+            <a:r>
+              <a:rPr lang="en-US" sz="1300" dirty="0">
+                <a:latin typeface="Arial" panose="020B0604020202020204" pitchFamily="34" charset="0"/>
+                <a:cs typeface="Arial" panose="020B0604020202020204" pitchFamily="34" charset="0"/>
+              </a:rPr>
+              <a:t>low visibility</a:t>
+            </a:r>
+          </a:p>
+        </p:txBody>
+      </p:sp>
+      <p:pic>
+        <p:nvPicPr>
+          <p:cNvPr id="14" name="図 13">
+            <a:extLst>
+              <a:ext uri="{FF2B5EF4-FFF2-40B4-BE49-F238E27FC236}">
+                <a16:creationId xmlns:a16="http://schemas.microsoft.com/office/drawing/2014/main" id="{1E0F62C9-6DEA-349D-4BE9-EF08ED6B9408}"/>
+              </a:ext>
+            </a:extLst>
+          </p:cNvPr>
+          <p:cNvPicPr>
+            <a:picLocks noChangeAspect="1"/>
+          </p:cNvPicPr>
+          <p:nvPr/>
+        </p:nvPicPr>
+        <p:blipFill>
+          <a:blip r:embed="rId3"/>
+          <a:srcRect l="50100" t="7263" r="4500" b="9185"/>
+          <a:stretch>
+            <a:fillRect/>
+          </a:stretch>
+        </p:blipFill>
+        <p:spPr>
+          <a:xfrm>
+            <a:off x="3894706" y="2678329"/>
+            <a:ext cx="1027934" cy="945884"/>
+          </a:xfrm>
+          <a:prstGeom prst="rect">
+            <a:avLst/>
+          </a:prstGeom>
+        </p:spPr>
+      </p:pic>
+      <p:sp>
+        <p:nvSpPr>
+          <p:cNvPr id="15" name="テキスト ボックス 14">
+            <a:extLst>
+              <a:ext uri="{FF2B5EF4-FFF2-40B4-BE49-F238E27FC236}">
+                <a16:creationId xmlns:a16="http://schemas.microsoft.com/office/drawing/2014/main" id="{E72B62E7-7CC7-A192-F040-FBE700A00062}"/>
+              </a:ext>
+            </a:extLst>
+          </p:cNvPr>
+          <p:cNvSpPr txBox="1"/>
+          <p:nvPr/>
+        </p:nvSpPr>
+        <p:spPr>
+          <a:xfrm>
+            <a:off x="3756747" y="2236340"/>
+            <a:ext cx="1307507" cy="492443"/>
+          </a:xfrm>
+          <a:prstGeom prst="rect">
+            <a:avLst/>
+          </a:prstGeom>
+          <a:noFill/>
+        </p:spPr>
+        <p:txBody>
+          <a:bodyPr wrap="square" rtlCol="0">
+            <a:spAutoFit/>
+          </a:bodyPr>
+          <a:lstStyle/>
+          <a:p>
+            <a:pPr algn="ctr"/>
+            <a:r>
+              <a:rPr lang="en-US" sz="1300" dirty="0">
+                <a:latin typeface="Arial" panose="020B0604020202020204" pitchFamily="34" charset="0"/>
+                <a:cs typeface="Arial" panose="020B0604020202020204" pitchFamily="34" charset="0"/>
+              </a:rPr>
+              <a:t>low confidence</a:t>
+            </a:r>
+            <a:br>
+              <a:rPr lang="en-US" sz="1300" dirty="0">
+                <a:latin typeface="Arial" panose="020B0604020202020204" pitchFamily="34" charset="0"/>
+                <a:cs typeface="Arial" panose="020B0604020202020204" pitchFamily="34" charset="0"/>
+              </a:rPr>
+            </a:br>
+            <a:r>
+              <a:rPr lang="en-US" sz="1300" dirty="0">
+                <a:latin typeface="Arial" panose="020B0604020202020204" pitchFamily="34" charset="0"/>
+                <a:cs typeface="Arial" panose="020B0604020202020204" pitchFamily="34" charset="0"/>
+              </a:rPr>
+              <a:t>high visibility</a:t>
+            </a:r>
+          </a:p>
+        </p:txBody>
+      </p:sp>
+      <p:sp>
+        <p:nvSpPr>
+          <p:cNvPr id="16" name="テキスト ボックス 15">
+            <a:extLst>
+              <a:ext uri="{FF2B5EF4-FFF2-40B4-BE49-F238E27FC236}">
+                <a16:creationId xmlns:a16="http://schemas.microsoft.com/office/drawing/2014/main" id="{1CCFFF7A-F651-AF97-D5F2-E819A1CE822F}"/>
+              </a:ext>
+            </a:extLst>
+          </p:cNvPr>
+          <p:cNvSpPr txBox="1"/>
+          <p:nvPr/>
+        </p:nvSpPr>
+        <p:spPr>
+          <a:xfrm>
+            <a:off x="542483" y="1943952"/>
+            <a:ext cx="4351581" cy="307777"/>
+          </a:xfrm>
+          <a:prstGeom prst="rect">
+            <a:avLst/>
+          </a:prstGeom>
+          <a:noFill/>
+        </p:spPr>
+        <p:txBody>
+          <a:bodyPr wrap="square" rtlCol="0">
+            <a:spAutoFit/>
+          </a:bodyPr>
+          <a:lstStyle/>
+          <a:p>
+            <a:pPr algn="ctr"/>
+            <a:r>
+              <a:rPr lang="en-US" sz="1400" dirty="0">
+                <a:latin typeface="Arial" panose="020B0604020202020204" pitchFamily="34" charset="0"/>
+                <a:cs typeface="Arial" panose="020B0604020202020204" pitchFamily="34" charset="0"/>
+              </a:rPr>
+              <a:t>Clockwise vs. counter-clockwise discrimination</a:t>
+            </a:r>
+          </a:p>
+        </p:txBody>
+      </p:sp>
+      <p:pic>
+        <p:nvPicPr>
+          <p:cNvPr id="17" name="図 16">
+            <a:extLst>
+              <a:ext uri="{FF2B5EF4-FFF2-40B4-BE49-F238E27FC236}">
+                <a16:creationId xmlns:a16="http://schemas.microsoft.com/office/drawing/2014/main" id="{8321CB7D-8B39-B345-B77F-4B3028588B81}"/>
+              </a:ext>
+            </a:extLst>
+          </p:cNvPr>
+          <p:cNvPicPr>
+            <a:picLocks noChangeAspect="1"/>
+          </p:cNvPicPr>
+          <p:nvPr/>
+        </p:nvPicPr>
+        <p:blipFill>
+          <a:blip r:embed="rId4"/>
+          <a:srcRect t="52745" r="79169" b="4030"/>
+          <a:stretch>
+            <a:fillRect/>
+          </a:stretch>
+        </p:blipFill>
+        <p:spPr>
+          <a:xfrm>
+            <a:off x="0" y="2221368"/>
+            <a:ext cx="2539671" cy="1580973"/>
+          </a:xfrm>
+          <a:prstGeom prst="rect">
+            <a:avLst/>
+          </a:prstGeom>
+        </p:spPr>
+      </p:pic>
+    </p:spTree>
+    <p:extLst>
+      <p:ext uri="{BB962C8B-B14F-4D97-AF65-F5344CB8AC3E}">
+        <p14:creationId xmlns:p14="http://schemas.microsoft.com/office/powerpoint/2010/main" val="2311986135"/>
+      </p:ext>
+    </p:extLst>
+  </p:cSld>
+  <p:clrMapOvr>
+    <a:masterClrMapping/>
+  </p:clrMapOvr>
+</p:sld>
+</file>
+
+<file path=ppt/slides/slide2.xml><?xml version="1.0" encoding="utf-8"?>
+<p:sld xmlns:a="http://schemas.openxmlformats.org/drawingml/2006/main" xmlns:r="http://schemas.openxmlformats.org/officeDocument/2006/relationships" xmlns:p="http://schemas.openxmlformats.org/presentationml/2006/main">
+  <p:cSld>
+    <p:spTree>
+      <p:nvGrpSpPr>
         <p:cNvPr id="1" name=""/>
         <p:cNvGrpSpPr/>
         <p:nvPr/>
@@ -4279,300 +4654,6 @@
           </p:sp>
         </mc:Fallback>
       </mc:AlternateContent>
-      <p:pic>
-        <p:nvPicPr>
-          <p:cNvPr id="17" name="図 16">
-            <a:extLst>
-              <a:ext uri="{FF2B5EF4-FFF2-40B4-BE49-F238E27FC236}">
-                <a16:creationId xmlns:a16="http://schemas.microsoft.com/office/drawing/2014/main" id="{A1B17E58-DB5F-9BBA-422C-AF7F1D83838F}"/>
-              </a:ext>
-            </a:extLst>
-          </p:cNvPr>
-          <p:cNvPicPr>
-            <a:picLocks noChangeAspect="1"/>
-          </p:cNvPicPr>
-          <p:nvPr/>
-        </p:nvPicPr>
-        <p:blipFill>
-          <a:blip r:embed="rId4">
-            <a:extLst>
-              <a:ext uri="{28A0092B-C50C-407E-A947-70E740481C1C}">
-                <a14:useLocalDpi xmlns:a14="http://schemas.microsoft.com/office/drawing/2010/main" val="0"/>
-              </a:ext>
-            </a:extLst>
-          </a:blip>
-          <a:stretch>
-            <a:fillRect/>
-          </a:stretch>
-        </p:blipFill>
-        <p:spPr>
-          <a:xfrm>
-            <a:off x="1658020" y="2269271"/>
-            <a:ext cx="3657607" cy="3474727"/>
-          </a:xfrm>
-          <a:prstGeom prst="rect">
-            <a:avLst/>
-          </a:prstGeom>
-        </p:spPr>
-      </p:pic>
-      <mc:AlternateContent xmlns:mc="http://schemas.openxmlformats.org/markup-compatibility/2006" xmlns:a14="http://schemas.microsoft.com/office/drawing/2010/main">
-        <mc:Choice Requires="a14">
-          <p:sp>
-            <p:nvSpPr>
-              <p:cNvPr id="18" name="テキスト ボックス 17">
-                <a:extLst>
-                  <a:ext uri="{FF2B5EF4-FFF2-40B4-BE49-F238E27FC236}">
-                    <a16:creationId xmlns:a16="http://schemas.microsoft.com/office/drawing/2014/main" id="{9191DF67-CC9E-801B-ACF8-B1046D29D7DE}"/>
-                  </a:ext>
-                </a:extLst>
-              </p:cNvPr>
-              <p:cNvSpPr txBox="1"/>
-              <p:nvPr/>
-            </p:nvSpPr>
-            <p:spPr>
-              <a:xfrm>
-                <a:off x="2428371" y="3074279"/>
-                <a:ext cx="1068391" cy="364908"/>
-              </a:xfrm>
-              <a:prstGeom prst="rect">
-                <a:avLst/>
-              </a:prstGeom>
-              <a:noFill/>
-            </p:spPr>
-            <p:txBody>
-              <a:bodyPr wrap="square" lIns="0" tIns="0" rIns="0" bIns="0" rtlCol="0">
-                <a:spAutoFit/>
-              </a:bodyPr>
-              <a:lstStyle/>
-              <a:p>
-                <a:pPr/>
-                <a14:m>
-                  <m:oMathPara xmlns:m="http://schemas.openxmlformats.org/officeDocument/2006/math">
-                    <m:oMathParaPr>
-                      <m:jc m:val="centerGroup"/>
-                    </m:oMathParaPr>
-                    <m:oMath xmlns:m="http://schemas.openxmlformats.org/officeDocument/2006/math">
-                      <m:f>
-                        <m:fPr>
-                          <m:ctrlPr>
-                            <a:rPr lang="en-US" sz="1100" b="1" i="1" smtClean="0">
-                              <a:latin typeface="Cambria Math" panose="02040503050406030204" pitchFamily="18" charset="0"/>
-                            </a:rPr>
-                          </m:ctrlPr>
-                        </m:fPr>
-                        <m:num>
-                          <m:r>
-                            <a:rPr lang="en-US" sz="1100" b="1" i="1" smtClean="0">
-                              <a:latin typeface="Cambria Math" panose="02040503050406030204" pitchFamily="18" charset="0"/>
-                            </a:rPr>
-                            <m:t>𝑹</m:t>
-                          </m:r>
-                          <m:r>
-                            <a:rPr lang="en-US" sz="1100" b="1" i="1" baseline="-25000" smtClean="0">
-                              <a:latin typeface="Cambria Math" panose="02040503050406030204" pitchFamily="18" charset="0"/>
-                            </a:rPr>
-                            <m:t>𝒎𝒂𝒙</m:t>
-                          </m:r>
-                          <m:r>
-                            <a:rPr lang="en-US" sz="1100" b="1" i="1" smtClean="0">
-                              <a:latin typeface="Cambria Math" panose="02040503050406030204" pitchFamily="18" charset="0"/>
-                            </a:rPr>
-                            <m:t>∗</m:t>
-                          </m:r>
-                          <m:sSup>
-                            <m:sSupPr>
-                              <m:ctrlPr>
-                                <a:rPr lang="en-US" sz="1100" b="1" i="1" smtClean="0">
-                                  <a:latin typeface="Cambria Math" panose="02040503050406030204" pitchFamily="18" charset="0"/>
-                                </a:rPr>
-                              </m:ctrlPr>
-                            </m:sSupPr>
-                            <m:e>
-                              <m:r>
-                                <a:rPr lang="en-US" sz="1100" b="1" i="1" smtClean="0">
-                                  <a:latin typeface="Cambria Math" panose="02040503050406030204" pitchFamily="18" charset="0"/>
-                                </a:rPr>
-                                <m:t>𝒄</m:t>
-                              </m:r>
-                            </m:e>
-                            <m:sup>
-                              <m:r>
-                                <a:rPr lang="en-US" sz="1100" b="1" i="1" smtClean="0">
-                                  <a:latin typeface="Cambria Math" panose="02040503050406030204" pitchFamily="18" charset="0"/>
-                                </a:rPr>
-                                <m:t>𝒏</m:t>
-                              </m:r>
-                            </m:sup>
-                          </m:sSup>
-                        </m:num>
-                        <m:den>
-                          <m:sSubSup>
-                            <m:sSubSupPr>
-                              <m:ctrlPr>
-                                <a:rPr lang="en-US" sz="1100" b="1" i="1" smtClean="0">
-                                  <a:latin typeface="Cambria Math" panose="02040503050406030204" pitchFamily="18" charset="0"/>
-                                </a:rPr>
-                              </m:ctrlPr>
-                            </m:sSubSupPr>
-                            <m:e>
-                              <m:r>
-                                <a:rPr lang="en-US" sz="1100" b="1" i="1" smtClean="0">
-                                  <a:latin typeface="Cambria Math" panose="02040503050406030204" pitchFamily="18" charset="0"/>
-                                </a:rPr>
-                                <m:t>𝒄</m:t>
-                              </m:r>
-                            </m:e>
-                            <m:sub>
-                              <m:r>
-                                <a:rPr lang="en-US" sz="1100" b="1" i="1" smtClean="0">
-                                  <a:latin typeface="Cambria Math" panose="02040503050406030204" pitchFamily="18" charset="0"/>
-                                </a:rPr>
-                                <m:t>𝟓𝟎</m:t>
-                              </m:r>
-                            </m:sub>
-                            <m:sup>
-                              <m:r>
-                                <a:rPr lang="en-US" sz="1100" b="1" i="1" smtClean="0">
-                                  <a:latin typeface="Cambria Math" panose="02040503050406030204" pitchFamily="18" charset="0"/>
-                                </a:rPr>
-                                <m:t>𝒏</m:t>
-                              </m:r>
-                            </m:sup>
-                          </m:sSubSup>
-                          <m:r>
-                            <a:rPr lang="en-US" sz="1100" b="1" i="1" smtClean="0">
-                              <a:latin typeface="Cambria Math" panose="02040503050406030204" pitchFamily="18" charset="0"/>
-                            </a:rPr>
-                            <m:t>+</m:t>
-                          </m:r>
-                          <m:sSup>
-                            <m:sSupPr>
-                              <m:ctrlPr>
-                                <a:rPr lang="en-US" sz="1100" b="1" i="1" smtClean="0">
-                                  <a:latin typeface="Cambria Math" panose="02040503050406030204" pitchFamily="18" charset="0"/>
-                                </a:rPr>
-                              </m:ctrlPr>
-                            </m:sSupPr>
-                            <m:e>
-                              <m:r>
-                                <a:rPr lang="en-US" sz="1100" b="1" i="1" smtClean="0">
-                                  <a:latin typeface="Cambria Math" panose="02040503050406030204" pitchFamily="18" charset="0"/>
-                                </a:rPr>
-                                <m:t>𝒄</m:t>
-                              </m:r>
-                            </m:e>
-                            <m:sup>
-                              <m:r>
-                                <a:rPr lang="en-US" sz="1100" b="1" i="1" smtClean="0">
-                                  <a:latin typeface="Cambria Math" panose="02040503050406030204" pitchFamily="18" charset="0"/>
-                                </a:rPr>
-                                <m:t>𝒏</m:t>
-                              </m:r>
-                            </m:sup>
-                          </m:sSup>
-                        </m:den>
-                      </m:f>
-                      <m:r>
-                        <a:rPr lang="en-US" sz="1100" b="1" i="1" smtClean="0">
-                          <a:latin typeface="Cambria Math" panose="02040503050406030204" pitchFamily="18" charset="0"/>
-                        </a:rPr>
-                        <m:t>+</m:t>
-                      </m:r>
-                      <m:r>
-                        <a:rPr lang="en-US" sz="1100" b="1" i="1" smtClean="0">
-                          <a:latin typeface="Cambria Math" panose="02040503050406030204" pitchFamily="18" charset="0"/>
-                        </a:rPr>
-                        <m:t>𝑹</m:t>
-                      </m:r>
-                      <m:r>
-                        <a:rPr lang="en-US" sz="1100" b="1" i="1" baseline="-25000" smtClean="0">
-                          <a:latin typeface="Cambria Math" panose="02040503050406030204" pitchFamily="18" charset="0"/>
-                        </a:rPr>
-                        <m:t>𝟎</m:t>
-                      </m:r>
-                    </m:oMath>
-                  </m:oMathPara>
-                </a14:m>
-                <a:endParaRPr lang="en-US" sz="1100" b="1" baseline="-25000" dirty="0"/>
-              </a:p>
-            </p:txBody>
-          </p:sp>
-        </mc:Choice>
-        <mc:Fallback xmlns="">
-          <p:sp>
-            <p:nvSpPr>
-              <p:cNvPr id="18" name="テキスト ボックス 17">
-                <a:extLst>
-                  <a:ext uri="{FF2B5EF4-FFF2-40B4-BE49-F238E27FC236}">
-                    <a16:creationId xmlns:a16="http://schemas.microsoft.com/office/drawing/2014/main" id="{9191DF67-CC9E-801B-ACF8-B1046D29D7DE}"/>
-                  </a:ext>
-                </a:extLst>
-              </p:cNvPr>
-              <p:cNvSpPr txBox="1">
-                <a:spLocks noRot="1" noChangeAspect="1" noMove="1" noResize="1" noEditPoints="1" noAdjustHandles="1" noChangeArrowheads="1" noChangeShapeType="1" noTextEdit="1"/>
-              </p:cNvSpPr>
-              <p:nvPr/>
-            </p:nvSpPr>
-            <p:spPr>
-              <a:xfrm>
-                <a:off x="2428371" y="3074279"/>
-                <a:ext cx="1068391" cy="364908"/>
-              </a:xfrm>
-              <a:prstGeom prst="rect">
-                <a:avLst/>
-              </a:prstGeom>
-              <a:blipFill>
-                <a:blip r:embed="rId5"/>
-                <a:stretch>
-                  <a:fillRect b="-10000"/>
-                </a:stretch>
-              </a:blipFill>
-            </p:spPr>
-            <p:txBody>
-              <a:bodyPr/>
-              <a:lstStyle/>
-              <a:p>
-                <a:r>
-                  <a:rPr lang="en-US">
-                    <a:noFill/>
-                  </a:rPr>
-                  <a:t> </a:t>
-                </a:r>
-              </a:p>
-            </p:txBody>
-          </p:sp>
-        </mc:Fallback>
-      </mc:AlternateContent>
-      <p:pic>
-        <p:nvPicPr>
-          <p:cNvPr id="7" name="図 6">
-            <a:extLst>
-              <a:ext uri="{FF2B5EF4-FFF2-40B4-BE49-F238E27FC236}">
-                <a16:creationId xmlns:a16="http://schemas.microsoft.com/office/drawing/2014/main" id="{0E4AF718-918B-F548-1C7D-EFECF0B55587}"/>
-              </a:ext>
-            </a:extLst>
-          </p:cNvPr>
-          <p:cNvPicPr>
-            <a:picLocks noChangeAspect="1"/>
-          </p:cNvPicPr>
-          <p:nvPr/>
-        </p:nvPicPr>
-        <p:blipFill>
-          <a:blip r:embed="rId6"/>
-          <a:stretch>
-            <a:fillRect/>
-          </a:stretch>
-        </p:blipFill>
-        <p:spPr>
-          <a:xfrm>
-            <a:off x="5254865" y="2278893"/>
-            <a:ext cx="4665190" cy="3403962"/>
-          </a:xfrm>
-          <a:prstGeom prst="rect">
-            <a:avLst/>
-          </a:prstGeom>
-        </p:spPr>
-      </p:pic>
       <p:sp>
         <p:nvSpPr>
           <p:cNvPr id="19" name="正方形/長方形 18">
@@ -4625,1118 +4706,10 @@
           </a:p>
         </p:txBody>
       </p:sp>
-      <p:pic>
-        <p:nvPicPr>
-          <p:cNvPr id="25" name="図 24">
-            <a:extLst>
-              <a:ext uri="{FF2B5EF4-FFF2-40B4-BE49-F238E27FC236}">
-                <a16:creationId xmlns:a16="http://schemas.microsoft.com/office/drawing/2014/main" id="{72162547-8AB2-83D1-A7C3-4E14EB0268E1}"/>
-              </a:ext>
-            </a:extLst>
-          </p:cNvPr>
-          <p:cNvPicPr>
-            <a:picLocks noChangeAspect="1"/>
-          </p:cNvPicPr>
-          <p:nvPr/>
-        </p:nvPicPr>
-        <p:blipFill>
-          <a:blip r:embed="rId7"/>
-          <a:stretch>
-            <a:fillRect/>
-          </a:stretch>
-        </p:blipFill>
-        <p:spPr>
-          <a:xfrm>
-            <a:off x="4991649" y="144557"/>
-            <a:ext cx="2755631" cy="1853345"/>
-          </a:xfrm>
-          <a:prstGeom prst="rect">
-            <a:avLst/>
-          </a:prstGeom>
-        </p:spPr>
-      </p:pic>
-      <p:pic>
-        <p:nvPicPr>
-          <p:cNvPr id="4" name="図 3">
-            <a:extLst>
-              <a:ext uri="{FF2B5EF4-FFF2-40B4-BE49-F238E27FC236}">
-                <a16:creationId xmlns:a16="http://schemas.microsoft.com/office/drawing/2014/main" id="{E0EF781F-3646-5676-D0FE-C1C66808D09C}"/>
-              </a:ext>
-            </a:extLst>
-          </p:cNvPr>
-          <p:cNvPicPr>
-            <a:picLocks noChangeAspect="1"/>
-          </p:cNvPicPr>
-          <p:nvPr/>
-        </p:nvPicPr>
-        <p:blipFill>
-          <a:blip r:embed="rId8"/>
-          <a:stretch>
-            <a:fillRect/>
-          </a:stretch>
-        </p:blipFill>
-        <p:spPr>
-          <a:xfrm>
-            <a:off x="6990374" y="2906951"/>
-            <a:ext cx="4645161" cy="3600000"/>
-          </a:xfrm>
-          <a:prstGeom prst="rect">
-            <a:avLst/>
-          </a:prstGeom>
-        </p:spPr>
-      </p:pic>
     </p:spTree>
     <p:extLst>
       <p:ext uri="{BB962C8B-B14F-4D97-AF65-F5344CB8AC3E}">
         <p14:creationId xmlns:p14="http://schemas.microsoft.com/office/powerpoint/2010/main" val="3883242787"/>
-      </p:ext>
-    </p:extLst>
-  </p:cSld>
-  <p:clrMapOvr>
-    <a:masterClrMapping/>
-  </p:clrMapOvr>
-</p:sld>
-</file>
-
-<file path=ppt/slides/slide2.xml><?xml version="1.0" encoding="utf-8"?>
-<p:sld xmlns:a="http://schemas.openxmlformats.org/drawingml/2006/main" xmlns:r="http://schemas.openxmlformats.org/officeDocument/2006/relationships" xmlns:p="http://schemas.openxmlformats.org/presentationml/2006/main">
-  <p:cSld>
-    <p:spTree>
-      <p:nvGrpSpPr>
-        <p:cNvPr id="1" name="">
-          <a:extLst>
-            <a:ext uri="{FF2B5EF4-FFF2-40B4-BE49-F238E27FC236}">
-              <a16:creationId xmlns:a16="http://schemas.microsoft.com/office/drawing/2014/main" id="{34B3B062-6C49-344E-84AB-48EEFED01FE4}"/>
-            </a:ext>
-          </a:extLst>
-        </p:cNvPr>
-        <p:cNvGrpSpPr/>
-        <p:nvPr/>
-      </p:nvGrpSpPr>
-      <p:grpSpPr>
-        <a:xfrm>
-          <a:off x="0" y="0"/>
-          <a:ext cx="0" cy="0"/>
-          <a:chOff x="0" y="0"/>
-          <a:chExt cx="0" cy="0"/>
-        </a:xfrm>
-      </p:grpSpPr>
-      <p:pic>
-        <p:nvPicPr>
-          <p:cNvPr id="4" name="図 3">
-            <a:extLst>
-              <a:ext uri="{FF2B5EF4-FFF2-40B4-BE49-F238E27FC236}">
-                <a16:creationId xmlns:a16="http://schemas.microsoft.com/office/drawing/2014/main" id="{4841400C-FED6-524B-8A59-4501B066CE9A}"/>
-              </a:ext>
-            </a:extLst>
-          </p:cNvPr>
-          <p:cNvPicPr>
-            <a:picLocks noChangeAspect="1"/>
-          </p:cNvPicPr>
-          <p:nvPr/>
-        </p:nvPicPr>
-        <p:blipFill>
-          <a:blip r:embed="rId2"/>
-          <a:stretch>
-            <a:fillRect/>
-          </a:stretch>
-        </p:blipFill>
-        <p:spPr>
-          <a:xfrm>
-            <a:off x="786127" y="2363846"/>
-            <a:ext cx="4645161" cy="3600000"/>
-          </a:xfrm>
-          <a:prstGeom prst="rect">
-            <a:avLst/>
-          </a:prstGeom>
-        </p:spPr>
-      </p:pic>
-      <p:pic>
-        <p:nvPicPr>
-          <p:cNvPr id="2" name="図 1">
-            <a:extLst>
-              <a:ext uri="{FF2B5EF4-FFF2-40B4-BE49-F238E27FC236}">
-                <a16:creationId xmlns:a16="http://schemas.microsoft.com/office/drawing/2014/main" id="{D8B835CD-E277-5956-0E64-E7371048D62D}"/>
-              </a:ext>
-            </a:extLst>
-          </p:cNvPr>
-          <p:cNvPicPr>
-            <a:picLocks noChangeAspect="1"/>
-          </p:cNvPicPr>
-          <p:nvPr/>
-        </p:nvPicPr>
-        <p:blipFill>
-          <a:blip r:embed="rId3">
-            <a:extLst>
-              <a:ext uri="{28A0092B-C50C-407E-A947-70E740481C1C}">
-                <a14:useLocalDpi xmlns:a14="http://schemas.microsoft.com/office/drawing/2010/main" val="0"/>
-              </a:ext>
-            </a:extLst>
-          </a:blip>
-          <a:srcRect l="50732" t="25651" r="-188" b="28603"/>
-          <a:stretch>
-            <a:fillRect/>
-          </a:stretch>
-        </p:blipFill>
-        <p:spPr>
-          <a:xfrm>
-            <a:off x="9948222" y="4572645"/>
-            <a:ext cx="1860976" cy="860677"/>
-          </a:xfrm>
-          <a:prstGeom prst="rect">
-            <a:avLst/>
-          </a:prstGeom>
-        </p:spPr>
-      </p:pic>
-      <p:pic>
-        <p:nvPicPr>
-          <p:cNvPr id="3" name="図 2">
-            <a:extLst>
-              <a:ext uri="{FF2B5EF4-FFF2-40B4-BE49-F238E27FC236}">
-                <a16:creationId xmlns:a16="http://schemas.microsoft.com/office/drawing/2014/main" id="{5A19F78A-0C99-FB1C-4F34-269CB8FF2560}"/>
-              </a:ext>
-            </a:extLst>
-          </p:cNvPr>
-          <p:cNvPicPr>
-            <a:picLocks noChangeAspect="1"/>
-          </p:cNvPicPr>
-          <p:nvPr/>
-        </p:nvPicPr>
-        <p:blipFill>
-          <a:blip r:embed="rId3">
-            <a:extLst>
-              <a:ext uri="{28A0092B-C50C-407E-A947-70E740481C1C}">
-                <a14:useLocalDpi xmlns:a14="http://schemas.microsoft.com/office/drawing/2010/main" val="0"/>
-              </a:ext>
-            </a:extLst>
-          </a:blip>
-          <a:srcRect l="188" t="25651" r="48491" b="28603"/>
-          <a:stretch>
-            <a:fillRect/>
-          </a:stretch>
-        </p:blipFill>
-        <p:spPr>
-          <a:xfrm>
-            <a:off x="9844933" y="3007648"/>
-            <a:ext cx="1931172" cy="860677"/>
-          </a:xfrm>
-          <a:prstGeom prst="rect">
-            <a:avLst/>
-          </a:prstGeom>
-        </p:spPr>
-      </p:pic>
-      <p:sp>
-        <p:nvSpPr>
-          <p:cNvPr id="6" name="正方形/長方形 5">
-            <a:extLst>
-              <a:ext uri="{FF2B5EF4-FFF2-40B4-BE49-F238E27FC236}">
-                <a16:creationId xmlns:a16="http://schemas.microsoft.com/office/drawing/2014/main" id="{C1446953-276E-5EA7-8F42-74378D7EA70E}"/>
-              </a:ext>
-            </a:extLst>
-          </p:cNvPr>
-          <p:cNvSpPr/>
-          <p:nvPr/>
-        </p:nvSpPr>
-        <p:spPr>
-          <a:xfrm>
-            <a:off x="9972867" y="4109363"/>
-            <a:ext cx="1716442" cy="1334209"/>
-          </a:xfrm>
-          <a:prstGeom prst="rect">
-            <a:avLst/>
-          </a:prstGeom>
-          <a:noFill/>
-          <a:ln w="19050">
-            <a:solidFill>
-              <a:srgbClr val="E41A1C"/>
-            </a:solidFill>
-          </a:ln>
-        </p:spPr>
-        <p:style>
-          <a:lnRef idx="2">
-            <a:schemeClr val="accent1">
-              <a:shade val="15000"/>
-            </a:schemeClr>
-          </a:lnRef>
-          <a:fillRef idx="1">
-            <a:schemeClr val="accent1"/>
-          </a:fillRef>
-          <a:effectRef idx="0">
-            <a:schemeClr val="accent1"/>
-          </a:effectRef>
-          <a:fontRef idx="minor">
-            <a:schemeClr val="lt1"/>
-          </a:fontRef>
-        </p:style>
-        <p:txBody>
-          <a:bodyPr rtlCol="0" anchor="ctr"/>
-          <a:lstStyle/>
-          <a:p>
-            <a:pPr algn="ctr"/>
-            <a:endParaRPr lang="en-US" sz="1500" b="1"/>
-          </a:p>
-        </p:txBody>
-      </p:sp>
-      <p:sp>
-        <p:nvSpPr>
-          <p:cNvPr id="8" name="テキスト ボックス 7">
-            <a:extLst>
-              <a:ext uri="{FF2B5EF4-FFF2-40B4-BE49-F238E27FC236}">
-                <a16:creationId xmlns:a16="http://schemas.microsoft.com/office/drawing/2014/main" id="{E092316E-B2CE-D5FF-C264-797AC0A2566D}"/>
-              </a:ext>
-            </a:extLst>
-          </p:cNvPr>
-          <p:cNvSpPr txBox="1"/>
-          <p:nvPr/>
-        </p:nvSpPr>
-        <p:spPr>
-          <a:xfrm>
-            <a:off x="10093734" y="2535267"/>
-            <a:ext cx="1517156" cy="323165"/>
-          </a:xfrm>
-          <a:prstGeom prst="rect">
-            <a:avLst/>
-          </a:prstGeom>
-          <a:noFill/>
-        </p:spPr>
-        <p:txBody>
-          <a:bodyPr wrap="square" rtlCol="0">
-            <a:spAutoFit/>
-          </a:bodyPr>
-          <a:lstStyle/>
-          <a:p>
-            <a:r>
-              <a:rPr lang="en-US" sz="1500" b="1" dirty="0"/>
-              <a:t>Contrast = 15%</a:t>
-            </a:r>
-          </a:p>
-        </p:txBody>
-      </p:sp>
-      <p:sp>
-        <p:nvSpPr>
-          <p:cNvPr id="9" name="テキスト ボックス 8">
-            <a:extLst>
-              <a:ext uri="{FF2B5EF4-FFF2-40B4-BE49-F238E27FC236}">
-                <a16:creationId xmlns:a16="http://schemas.microsoft.com/office/drawing/2014/main" id="{A3C7C4AA-5841-E368-8546-E5F29EAD7009}"/>
-              </a:ext>
-            </a:extLst>
-          </p:cNvPr>
-          <p:cNvSpPr txBox="1"/>
-          <p:nvPr/>
-        </p:nvSpPr>
-        <p:spPr>
-          <a:xfrm>
-            <a:off x="10093734" y="4108411"/>
-            <a:ext cx="1517156" cy="323165"/>
-          </a:xfrm>
-          <a:prstGeom prst="rect">
-            <a:avLst/>
-          </a:prstGeom>
-          <a:noFill/>
-        </p:spPr>
-        <p:txBody>
-          <a:bodyPr wrap="square" rtlCol="0">
-            <a:spAutoFit/>
-          </a:bodyPr>
-          <a:lstStyle/>
-          <a:p>
-            <a:r>
-              <a:rPr lang="en-US" sz="1500" b="1" dirty="0"/>
-              <a:t>Contrast = 25%</a:t>
-            </a:r>
-          </a:p>
-        </p:txBody>
-      </p:sp>
-      <p:sp>
-        <p:nvSpPr>
-          <p:cNvPr id="10" name="テキスト ボックス 9">
-            <a:extLst>
-              <a:ext uri="{FF2B5EF4-FFF2-40B4-BE49-F238E27FC236}">
-                <a16:creationId xmlns:a16="http://schemas.microsoft.com/office/drawing/2014/main" id="{66E07B54-4D51-041A-0498-297DF087313B}"/>
-              </a:ext>
-            </a:extLst>
-          </p:cNvPr>
-          <p:cNvSpPr txBox="1"/>
-          <p:nvPr/>
-        </p:nvSpPr>
-        <p:spPr>
-          <a:xfrm>
-            <a:off x="10036584" y="2790988"/>
-            <a:ext cx="998185" cy="323165"/>
-          </a:xfrm>
-          <a:prstGeom prst="rect">
-            <a:avLst/>
-          </a:prstGeom>
-          <a:noFill/>
-        </p:spPr>
-        <p:txBody>
-          <a:bodyPr wrap="square" rtlCol="0">
-            <a:spAutoFit/>
-          </a:bodyPr>
-          <a:lstStyle/>
-          <a:p>
-            <a:r>
-              <a:rPr lang="ja-JP" altLang="en-US" sz="1500" b="1" dirty="0">
-                <a:solidFill>
-                  <a:srgbClr val="1F78B4"/>
-                </a:solidFill>
-              </a:rPr>
-              <a:t>●</a:t>
-            </a:r>
-            <a:r>
-              <a:rPr lang="ja-JP" altLang="en-US" sz="1500" b="1" dirty="0"/>
-              <a:t> </a:t>
-            </a:r>
-            <a:r>
-              <a:rPr lang="en-US" sz="1500" b="1" dirty="0"/>
-              <a:t>90</a:t>
-            </a:r>
-            <a:r>
-              <a:rPr lang="en-US" altLang="ja-JP" sz="1500" b="1" dirty="0"/>
-              <a:t>°</a:t>
-            </a:r>
-            <a:endParaRPr lang="en-US" sz="1500" b="1" dirty="0"/>
-          </a:p>
-        </p:txBody>
-      </p:sp>
-      <p:sp>
-        <p:nvSpPr>
-          <p:cNvPr id="11" name="テキスト ボックス 10">
-            <a:extLst>
-              <a:ext uri="{FF2B5EF4-FFF2-40B4-BE49-F238E27FC236}">
-                <a16:creationId xmlns:a16="http://schemas.microsoft.com/office/drawing/2014/main" id="{CE04A373-4B51-CCE5-BE24-34E3D4D2A118}"/>
-              </a:ext>
-            </a:extLst>
-          </p:cNvPr>
-          <p:cNvSpPr txBox="1"/>
-          <p:nvPr/>
-        </p:nvSpPr>
-        <p:spPr>
-          <a:xfrm>
-            <a:off x="10848309" y="2787313"/>
-            <a:ext cx="931212" cy="323165"/>
-          </a:xfrm>
-          <a:prstGeom prst="rect">
-            <a:avLst/>
-          </a:prstGeom>
-          <a:noFill/>
-        </p:spPr>
-        <p:txBody>
-          <a:bodyPr wrap="square" rtlCol="0">
-            <a:spAutoFit/>
-          </a:bodyPr>
-          <a:lstStyle/>
-          <a:p>
-            <a:pPr algn="r"/>
-            <a:r>
-              <a:rPr lang="ja-JP" altLang="en-US" sz="1500" b="1" dirty="0">
-                <a:solidFill>
-                  <a:srgbClr val="1F78B4"/>
-                </a:solidFill>
-              </a:rPr>
-              <a:t>＋</a:t>
-            </a:r>
-            <a:r>
-              <a:rPr lang="ja-JP" altLang="en-US" sz="1500" b="1" dirty="0"/>
-              <a:t> </a:t>
-            </a:r>
-            <a:r>
-              <a:rPr lang="en-US" altLang="ja-JP" sz="1500" b="1" dirty="0"/>
-              <a:t>10</a:t>
-            </a:r>
-            <a:r>
-              <a:rPr lang="en-US" sz="1500" b="1" dirty="0"/>
-              <a:t>0</a:t>
-            </a:r>
-            <a:r>
-              <a:rPr lang="en-US" altLang="ja-JP" sz="1500" b="1" dirty="0"/>
-              <a:t>°</a:t>
-            </a:r>
-            <a:endParaRPr lang="en-US" sz="1500" b="1" dirty="0"/>
-          </a:p>
-        </p:txBody>
-      </p:sp>
-      <p:sp>
-        <p:nvSpPr>
-          <p:cNvPr id="12" name="テキスト ボックス 11">
-            <a:extLst>
-              <a:ext uri="{FF2B5EF4-FFF2-40B4-BE49-F238E27FC236}">
-                <a16:creationId xmlns:a16="http://schemas.microsoft.com/office/drawing/2014/main" id="{2FF2A879-6DB4-E5F1-960A-815AB1F6FC44}"/>
-              </a:ext>
-            </a:extLst>
-          </p:cNvPr>
-          <p:cNvSpPr txBox="1"/>
-          <p:nvPr/>
-        </p:nvSpPr>
-        <p:spPr>
-          <a:xfrm>
-            <a:off x="10041010" y="4354294"/>
-            <a:ext cx="837700" cy="323165"/>
-          </a:xfrm>
-          <a:prstGeom prst="rect">
-            <a:avLst/>
-          </a:prstGeom>
-          <a:noFill/>
-        </p:spPr>
-        <p:txBody>
-          <a:bodyPr wrap="square" rtlCol="0">
-            <a:spAutoFit/>
-          </a:bodyPr>
-          <a:lstStyle/>
-          <a:p>
-            <a:r>
-              <a:rPr lang="ja-JP" altLang="en-US" sz="1500" b="1" dirty="0">
-                <a:solidFill>
-                  <a:srgbClr val="E41A1C"/>
-                </a:solidFill>
-              </a:rPr>
-              <a:t>●</a:t>
-            </a:r>
-            <a:r>
-              <a:rPr lang="ja-JP" altLang="en-US" sz="1500" b="1" dirty="0"/>
-              <a:t> </a:t>
-            </a:r>
-            <a:r>
-              <a:rPr lang="en-US" sz="1500" b="1" dirty="0"/>
-              <a:t>90</a:t>
-            </a:r>
-            <a:r>
-              <a:rPr lang="en-US" altLang="ja-JP" sz="1500" b="1" dirty="0"/>
-              <a:t>°</a:t>
-            </a:r>
-            <a:endParaRPr lang="en-US" sz="1500" b="1" dirty="0"/>
-          </a:p>
-        </p:txBody>
-      </p:sp>
-      <p:sp>
-        <p:nvSpPr>
-          <p:cNvPr id="13" name="テキスト ボックス 12">
-            <a:extLst>
-              <a:ext uri="{FF2B5EF4-FFF2-40B4-BE49-F238E27FC236}">
-                <a16:creationId xmlns:a16="http://schemas.microsoft.com/office/drawing/2014/main" id="{C8DE6F58-78CA-E6D4-C9AE-54F1EC1EDAEB}"/>
-              </a:ext>
-            </a:extLst>
-          </p:cNvPr>
-          <p:cNvSpPr txBox="1"/>
-          <p:nvPr/>
-        </p:nvSpPr>
-        <p:spPr>
-          <a:xfrm>
-            <a:off x="10794544" y="4352590"/>
-            <a:ext cx="988548" cy="323165"/>
-          </a:xfrm>
-          <a:prstGeom prst="rect">
-            <a:avLst/>
-          </a:prstGeom>
-          <a:noFill/>
-        </p:spPr>
-        <p:txBody>
-          <a:bodyPr wrap="square" rtlCol="0">
-            <a:spAutoFit/>
-          </a:bodyPr>
-          <a:lstStyle/>
-          <a:p>
-            <a:pPr algn="r"/>
-            <a:r>
-              <a:rPr lang="ja-JP" altLang="en-US" sz="1500" b="1" dirty="0">
-                <a:solidFill>
-                  <a:srgbClr val="E83E40"/>
-                </a:solidFill>
-              </a:rPr>
-              <a:t>＋</a:t>
-            </a:r>
-            <a:r>
-              <a:rPr lang="ja-JP" altLang="en-US" sz="1500" b="1" dirty="0"/>
-              <a:t> </a:t>
-            </a:r>
-            <a:r>
-              <a:rPr lang="en-US" altLang="ja-JP" sz="1500" b="1" dirty="0"/>
-              <a:t>10</a:t>
-            </a:r>
-            <a:r>
-              <a:rPr lang="en-US" sz="1500" b="1" dirty="0"/>
-              <a:t>0</a:t>
-            </a:r>
-            <a:r>
-              <a:rPr lang="en-US" altLang="ja-JP" sz="1500" b="1" dirty="0"/>
-              <a:t>°</a:t>
-            </a:r>
-            <a:endParaRPr lang="en-US" sz="1500" b="1" dirty="0"/>
-          </a:p>
-        </p:txBody>
-      </p:sp>
-      <mc:AlternateContent xmlns:mc="http://schemas.openxmlformats.org/markup-compatibility/2006" xmlns:a14="http://schemas.microsoft.com/office/drawing/2010/main">
-        <mc:Choice Requires="a14">
-          <p:sp>
-            <p:nvSpPr>
-              <p:cNvPr id="15" name="テキスト ボックス 14">
-                <a:extLst>
-                  <a:ext uri="{FF2B5EF4-FFF2-40B4-BE49-F238E27FC236}">
-                    <a16:creationId xmlns:a16="http://schemas.microsoft.com/office/drawing/2014/main" id="{92AC4068-B15A-6D34-4F87-808D5552D186}"/>
-                  </a:ext>
-                </a:extLst>
-              </p:cNvPr>
-              <p:cNvSpPr txBox="1"/>
-              <p:nvPr/>
-            </p:nvSpPr>
-            <p:spPr>
-              <a:xfrm>
-                <a:off x="1352159" y="411659"/>
-                <a:ext cx="1988177" cy="750334"/>
-              </a:xfrm>
-              <a:prstGeom prst="rect">
-                <a:avLst/>
-              </a:prstGeom>
-              <a:noFill/>
-            </p:spPr>
-            <p:txBody>
-              <a:bodyPr wrap="square" lIns="0" tIns="0" rIns="0" bIns="0" rtlCol="0">
-                <a:spAutoFit/>
-              </a:bodyPr>
-              <a:lstStyle/>
-              <a:p>
-                <a:pPr/>
-                <a14:m>
-                  <m:oMathPara xmlns:m="http://schemas.openxmlformats.org/officeDocument/2006/math">
-                    <m:oMathParaPr>
-                      <m:jc m:val="centerGroup"/>
-                    </m:oMathParaPr>
-                    <m:oMath xmlns:m="http://schemas.openxmlformats.org/officeDocument/2006/math">
-                      <m:f>
-                        <m:fPr>
-                          <m:ctrlPr>
-                            <a:rPr lang="en-US" sz="2200" b="1" i="1" smtClean="0">
-                              <a:latin typeface="Cambria Math" panose="02040503050406030204" pitchFamily="18" charset="0"/>
-                            </a:rPr>
-                          </m:ctrlPr>
-                        </m:fPr>
-                        <m:num>
-                          <m:r>
-                            <a:rPr lang="en-US" sz="2200" b="1" i="1" smtClean="0">
-                              <a:latin typeface="Cambria Math" panose="02040503050406030204" pitchFamily="18" charset="0"/>
-                            </a:rPr>
-                            <m:t>𝑹</m:t>
-                          </m:r>
-                          <m:r>
-                            <a:rPr lang="en-US" sz="2200" b="1" i="1" baseline="-25000" smtClean="0">
-                              <a:latin typeface="Cambria Math" panose="02040503050406030204" pitchFamily="18" charset="0"/>
-                            </a:rPr>
-                            <m:t>𝒎𝒂𝒙</m:t>
-                          </m:r>
-                          <m:r>
-                            <a:rPr lang="en-US" sz="2200" b="1" i="1" smtClean="0">
-                              <a:latin typeface="Cambria Math" panose="02040503050406030204" pitchFamily="18" charset="0"/>
-                            </a:rPr>
-                            <m:t>∗</m:t>
-                          </m:r>
-                          <m:sSup>
-                            <m:sSupPr>
-                              <m:ctrlPr>
-                                <a:rPr lang="en-US" sz="2200" b="1" i="1" smtClean="0">
-                                  <a:latin typeface="Cambria Math" panose="02040503050406030204" pitchFamily="18" charset="0"/>
-                                </a:rPr>
-                              </m:ctrlPr>
-                            </m:sSupPr>
-                            <m:e>
-                              <m:r>
-                                <a:rPr lang="en-US" sz="2200" b="1" i="1" smtClean="0">
-                                  <a:latin typeface="Cambria Math" panose="02040503050406030204" pitchFamily="18" charset="0"/>
-                                </a:rPr>
-                                <m:t>𝒄</m:t>
-                              </m:r>
-                            </m:e>
-                            <m:sup>
-                              <m:r>
-                                <a:rPr lang="en-US" sz="2200" b="1" i="1" smtClean="0">
-                                  <a:latin typeface="Cambria Math" panose="02040503050406030204" pitchFamily="18" charset="0"/>
-                                </a:rPr>
-                                <m:t>𝒏</m:t>
-                              </m:r>
-                            </m:sup>
-                          </m:sSup>
-                        </m:num>
-                        <m:den>
-                          <m:sSubSup>
-                            <m:sSubSupPr>
-                              <m:ctrlPr>
-                                <a:rPr lang="en-US" sz="2200" b="1" i="1" smtClean="0">
-                                  <a:latin typeface="Cambria Math" panose="02040503050406030204" pitchFamily="18" charset="0"/>
-                                </a:rPr>
-                              </m:ctrlPr>
-                            </m:sSubSupPr>
-                            <m:e>
-                              <m:r>
-                                <a:rPr lang="en-US" sz="2200" b="1" i="1" smtClean="0">
-                                  <a:latin typeface="Cambria Math" panose="02040503050406030204" pitchFamily="18" charset="0"/>
-                                </a:rPr>
-                                <m:t>𝒄</m:t>
-                              </m:r>
-                            </m:e>
-                            <m:sub>
-                              <m:r>
-                                <a:rPr lang="en-US" sz="2200" b="1" i="1" smtClean="0">
-                                  <a:latin typeface="Cambria Math" panose="02040503050406030204" pitchFamily="18" charset="0"/>
-                                </a:rPr>
-                                <m:t>𝟓𝟎</m:t>
-                              </m:r>
-                            </m:sub>
-                            <m:sup>
-                              <m:r>
-                                <a:rPr lang="en-US" sz="2200" b="1" i="1" smtClean="0">
-                                  <a:latin typeface="Cambria Math" panose="02040503050406030204" pitchFamily="18" charset="0"/>
-                                </a:rPr>
-                                <m:t>𝒏</m:t>
-                              </m:r>
-                            </m:sup>
-                          </m:sSubSup>
-                          <m:r>
-                            <a:rPr lang="en-US" sz="2200" b="1" i="1" smtClean="0">
-                              <a:latin typeface="Cambria Math" panose="02040503050406030204" pitchFamily="18" charset="0"/>
-                            </a:rPr>
-                            <m:t>+</m:t>
-                          </m:r>
-                          <m:sSup>
-                            <m:sSupPr>
-                              <m:ctrlPr>
-                                <a:rPr lang="en-US" sz="2200" b="1" i="1" smtClean="0">
-                                  <a:latin typeface="Cambria Math" panose="02040503050406030204" pitchFamily="18" charset="0"/>
-                                </a:rPr>
-                              </m:ctrlPr>
-                            </m:sSupPr>
-                            <m:e>
-                              <m:r>
-                                <a:rPr lang="en-US" sz="2200" b="1" i="1" smtClean="0">
-                                  <a:latin typeface="Cambria Math" panose="02040503050406030204" pitchFamily="18" charset="0"/>
-                                </a:rPr>
-                                <m:t>𝒄</m:t>
-                              </m:r>
-                            </m:e>
-                            <m:sup>
-                              <m:r>
-                                <a:rPr lang="en-US" sz="2200" b="1" i="1" smtClean="0">
-                                  <a:latin typeface="Cambria Math" panose="02040503050406030204" pitchFamily="18" charset="0"/>
-                                </a:rPr>
-                                <m:t>𝒏</m:t>
-                              </m:r>
-                            </m:sup>
-                          </m:sSup>
-                        </m:den>
-                      </m:f>
-                      <m:r>
-                        <a:rPr lang="en-US" sz="2200" b="1" i="1" smtClean="0">
-                          <a:latin typeface="Cambria Math" panose="02040503050406030204" pitchFamily="18" charset="0"/>
-                        </a:rPr>
-                        <m:t>+</m:t>
-                      </m:r>
-                      <m:r>
-                        <a:rPr lang="en-US" sz="2200" b="1" i="1" smtClean="0">
-                          <a:latin typeface="Cambria Math" panose="02040503050406030204" pitchFamily="18" charset="0"/>
-                        </a:rPr>
-                        <m:t>𝑹</m:t>
-                      </m:r>
-                      <m:r>
-                        <a:rPr lang="en-US" sz="2200" b="1" i="1" baseline="-25000" smtClean="0">
-                          <a:latin typeface="Cambria Math" panose="02040503050406030204" pitchFamily="18" charset="0"/>
-                        </a:rPr>
-                        <m:t>𝟎</m:t>
-                      </m:r>
-                    </m:oMath>
-                  </m:oMathPara>
-                </a14:m>
-                <a:endParaRPr lang="en-US" sz="2200" b="1" baseline="-25000" dirty="0"/>
-              </a:p>
-            </p:txBody>
-          </p:sp>
-        </mc:Choice>
-        <mc:Fallback xmlns="">
-          <p:sp>
-            <p:nvSpPr>
-              <p:cNvPr id="15" name="テキスト ボックス 14">
-                <a:extLst>
-                  <a:ext uri="{FF2B5EF4-FFF2-40B4-BE49-F238E27FC236}">
-                    <a16:creationId xmlns:a16="http://schemas.microsoft.com/office/drawing/2014/main" id="{88275334-5C8D-9F86-6932-E8CBCBE1E9D5}"/>
-                  </a:ext>
-                </a:extLst>
-              </p:cNvPr>
-              <p:cNvSpPr txBox="1">
-                <a:spLocks noRot="1" noChangeAspect="1" noMove="1" noResize="1" noEditPoints="1" noAdjustHandles="1" noChangeArrowheads="1" noChangeShapeType="1" noTextEdit="1"/>
-              </p:cNvSpPr>
-              <p:nvPr/>
-            </p:nvSpPr>
-            <p:spPr>
-              <a:xfrm>
-                <a:off x="1352159" y="411659"/>
-                <a:ext cx="1988177" cy="750334"/>
-              </a:xfrm>
-              <a:prstGeom prst="rect">
-                <a:avLst/>
-              </a:prstGeom>
-              <a:blipFill>
-                <a:blip r:embed="rId4"/>
-                <a:stretch>
-                  <a:fillRect/>
-                </a:stretch>
-              </a:blipFill>
-            </p:spPr>
-            <p:txBody>
-              <a:bodyPr/>
-              <a:lstStyle/>
-              <a:p>
-                <a:r>
-                  <a:rPr lang="en-US">
-                    <a:noFill/>
-                  </a:rPr>
-                  <a:t> </a:t>
-                </a:r>
-              </a:p>
-            </p:txBody>
-          </p:sp>
-        </mc:Fallback>
-      </mc:AlternateContent>
-      <mc:AlternateContent xmlns:mc="http://schemas.openxmlformats.org/markup-compatibility/2006">
-        <mc:Choice xmlns:a14="http://schemas.microsoft.com/office/drawing/2010/main" Requires="a14">
-          <p:sp>
-            <p:nvSpPr>
-              <p:cNvPr id="18" name="テキスト ボックス 17">
-                <a:extLst>
-                  <a:ext uri="{FF2B5EF4-FFF2-40B4-BE49-F238E27FC236}">
-                    <a16:creationId xmlns:a16="http://schemas.microsoft.com/office/drawing/2014/main" id="{45F961D4-F340-6EB7-29A1-7EB46A5A3CF7}"/>
-                  </a:ext>
-                </a:extLst>
-              </p:cNvPr>
-              <p:cNvSpPr txBox="1"/>
-              <p:nvPr/>
-            </p:nvSpPr>
-            <p:spPr>
-              <a:xfrm>
-                <a:off x="1952105" y="3144470"/>
-                <a:ext cx="1068391" cy="364908"/>
-              </a:xfrm>
-              <a:prstGeom prst="rect">
-                <a:avLst/>
-              </a:prstGeom>
-              <a:noFill/>
-            </p:spPr>
-            <p:txBody>
-              <a:bodyPr wrap="square" lIns="0" tIns="0" rIns="0" bIns="0" rtlCol="0">
-                <a:spAutoFit/>
-              </a:bodyPr>
-              <a:lstStyle/>
-              <a:p>
-                <a:pPr/>
-                <a14:m>
-                  <m:oMathPara xmlns:m="http://schemas.openxmlformats.org/officeDocument/2006/math">
-                    <m:oMathParaPr>
-                      <m:jc m:val="centerGroup"/>
-                    </m:oMathParaPr>
-                    <m:oMath xmlns:m="http://schemas.openxmlformats.org/officeDocument/2006/math">
-                      <m:f>
-                        <m:fPr>
-                          <m:ctrlPr>
-                            <a:rPr lang="en-US" sz="1100" b="1" i="1" smtClean="0">
-                              <a:latin typeface="Cambria Math" panose="02040503050406030204" pitchFamily="18" charset="0"/>
-                            </a:rPr>
-                          </m:ctrlPr>
-                        </m:fPr>
-                        <m:num>
-                          <m:r>
-                            <a:rPr lang="en-US" sz="1100" b="1" i="1" smtClean="0">
-                              <a:latin typeface="Cambria Math" panose="02040503050406030204" pitchFamily="18" charset="0"/>
-                            </a:rPr>
-                            <m:t>𝑹</m:t>
-                          </m:r>
-                          <m:r>
-                            <a:rPr lang="en-US" sz="1100" b="1" i="1" baseline="-25000" smtClean="0">
-                              <a:latin typeface="Cambria Math" panose="02040503050406030204" pitchFamily="18" charset="0"/>
-                            </a:rPr>
-                            <m:t>𝒎𝒂𝒙</m:t>
-                          </m:r>
-                          <m:r>
-                            <a:rPr lang="en-US" sz="1100" b="1" i="1" smtClean="0">
-                              <a:latin typeface="Cambria Math" panose="02040503050406030204" pitchFamily="18" charset="0"/>
-                            </a:rPr>
-                            <m:t>∗</m:t>
-                          </m:r>
-                          <m:sSup>
-                            <m:sSupPr>
-                              <m:ctrlPr>
-                                <a:rPr lang="en-US" sz="1100" b="1" i="1" smtClean="0">
-                                  <a:latin typeface="Cambria Math" panose="02040503050406030204" pitchFamily="18" charset="0"/>
-                                </a:rPr>
-                              </m:ctrlPr>
-                            </m:sSupPr>
-                            <m:e>
-                              <m:r>
-                                <a:rPr lang="en-US" sz="1100" b="1" i="1" smtClean="0">
-                                  <a:latin typeface="Cambria Math" panose="02040503050406030204" pitchFamily="18" charset="0"/>
-                                </a:rPr>
-                                <m:t>𝒄</m:t>
-                              </m:r>
-                            </m:e>
-                            <m:sup>
-                              <m:r>
-                                <a:rPr lang="en-US" sz="1100" b="1" i="1" smtClean="0">
-                                  <a:latin typeface="Cambria Math" panose="02040503050406030204" pitchFamily="18" charset="0"/>
-                                </a:rPr>
-                                <m:t>𝒏</m:t>
-                              </m:r>
-                            </m:sup>
-                          </m:sSup>
-                        </m:num>
-                        <m:den>
-                          <m:sSubSup>
-                            <m:sSubSupPr>
-                              <m:ctrlPr>
-                                <a:rPr lang="en-US" sz="1100" b="1" i="1" smtClean="0">
-                                  <a:latin typeface="Cambria Math" panose="02040503050406030204" pitchFamily="18" charset="0"/>
-                                </a:rPr>
-                              </m:ctrlPr>
-                            </m:sSubSupPr>
-                            <m:e>
-                              <m:r>
-                                <a:rPr lang="en-US" sz="1100" b="1" i="1" smtClean="0">
-                                  <a:latin typeface="Cambria Math" panose="02040503050406030204" pitchFamily="18" charset="0"/>
-                                </a:rPr>
-                                <m:t>𝒄</m:t>
-                              </m:r>
-                            </m:e>
-                            <m:sub>
-                              <m:r>
-                                <a:rPr lang="en-US" sz="1100" b="1" i="1" smtClean="0">
-                                  <a:latin typeface="Cambria Math" panose="02040503050406030204" pitchFamily="18" charset="0"/>
-                                </a:rPr>
-                                <m:t>𝟓𝟎</m:t>
-                              </m:r>
-                            </m:sub>
-                            <m:sup>
-                              <m:r>
-                                <a:rPr lang="en-US" sz="1100" b="1" i="1" smtClean="0">
-                                  <a:latin typeface="Cambria Math" panose="02040503050406030204" pitchFamily="18" charset="0"/>
-                                </a:rPr>
-                                <m:t>𝒏</m:t>
-                              </m:r>
-                            </m:sup>
-                          </m:sSubSup>
-                          <m:r>
-                            <a:rPr lang="en-US" sz="1100" b="1" i="1" smtClean="0">
-                              <a:latin typeface="Cambria Math" panose="02040503050406030204" pitchFamily="18" charset="0"/>
-                            </a:rPr>
-                            <m:t>+</m:t>
-                          </m:r>
-                          <m:sSup>
-                            <m:sSupPr>
-                              <m:ctrlPr>
-                                <a:rPr lang="en-US" sz="1100" b="1" i="1" smtClean="0">
-                                  <a:latin typeface="Cambria Math" panose="02040503050406030204" pitchFamily="18" charset="0"/>
-                                </a:rPr>
-                              </m:ctrlPr>
-                            </m:sSupPr>
-                            <m:e>
-                              <m:r>
-                                <a:rPr lang="en-US" sz="1100" b="1" i="1" smtClean="0">
-                                  <a:latin typeface="Cambria Math" panose="02040503050406030204" pitchFamily="18" charset="0"/>
-                                </a:rPr>
-                                <m:t>𝒄</m:t>
-                              </m:r>
-                            </m:e>
-                            <m:sup>
-                              <m:r>
-                                <a:rPr lang="en-US" sz="1100" b="1" i="1" smtClean="0">
-                                  <a:latin typeface="Cambria Math" panose="02040503050406030204" pitchFamily="18" charset="0"/>
-                                </a:rPr>
-                                <m:t>𝒏</m:t>
-                              </m:r>
-                            </m:sup>
-                          </m:sSup>
-                        </m:den>
-                      </m:f>
-                      <m:r>
-                        <a:rPr lang="en-US" sz="1100" b="1" i="1" smtClean="0">
-                          <a:latin typeface="Cambria Math" panose="02040503050406030204" pitchFamily="18" charset="0"/>
-                        </a:rPr>
-                        <m:t>+</m:t>
-                      </m:r>
-                      <m:r>
-                        <a:rPr lang="en-US" sz="1100" b="1" i="1" smtClean="0">
-                          <a:latin typeface="Cambria Math" panose="02040503050406030204" pitchFamily="18" charset="0"/>
-                        </a:rPr>
-                        <m:t>𝑹</m:t>
-                      </m:r>
-                      <m:r>
-                        <a:rPr lang="en-US" sz="1100" b="1" i="1" baseline="-25000" smtClean="0">
-                          <a:latin typeface="Cambria Math" panose="02040503050406030204" pitchFamily="18" charset="0"/>
-                        </a:rPr>
-                        <m:t>𝟎</m:t>
-                      </m:r>
-                    </m:oMath>
-                  </m:oMathPara>
-                </a14:m>
-                <a:endParaRPr lang="en-US" sz="1100" b="1" baseline="-25000" dirty="0"/>
-              </a:p>
-            </p:txBody>
-          </p:sp>
-        </mc:Choice>
-        <mc:Fallback>
-          <p:sp>
-            <p:nvSpPr>
-              <p:cNvPr id="18" name="テキスト ボックス 17">
-                <a:extLst>
-                  <a:ext uri="{FF2B5EF4-FFF2-40B4-BE49-F238E27FC236}">
-                    <a16:creationId xmlns:a16="http://schemas.microsoft.com/office/drawing/2014/main" id="{45F961D4-F340-6EB7-29A1-7EB46A5A3CF7}"/>
-                  </a:ext>
-                </a:extLst>
-              </p:cNvPr>
-              <p:cNvSpPr txBox="1">
-                <a:spLocks noRot="1" noChangeAspect="1" noMove="1" noResize="1" noEditPoints="1" noAdjustHandles="1" noChangeArrowheads="1" noChangeShapeType="1" noTextEdit="1"/>
-              </p:cNvSpPr>
-              <p:nvPr/>
-            </p:nvSpPr>
-            <p:spPr>
-              <a:xfrm>
-                <a:off x="1952105" y="3144470"/>
-                <a:ext cx="1068391" cy="364908"/>
-              </a:xfrm>
-              <a:prstGeom prst="rect">
-                <a:avLst/>
-              </a:prstGeom>
-              <a:blipFill>
-                <a:blip r:embed="rId5"/>
-                <a:stretch>
-                  <a:fillRect b="-8333"/>
-                </a:stretch>
-              </a:blipFill>
-            </p:spPr>
-            <p:txBody>
-              <a:bodyPr/>
-              <a:lstStyle/>
-              <a:p>
-                <a:r>
-                  <a:rPr lang="en-US">
-                    <a:noFill/>
-                  </a:rPr>
-                  <a:t> </a:t>
-                </a:r>
-              </a:p>
-            </p:txBody>
-          </p:sp>
-        </mc:Fallback>
-      </mc:AlternateContent>
-      <p:pic>
-        <p:nvPicPr>
-          <p:cNvPr id="7" name="図 6">
-            <a:extLst>
-              <a:ext uri="{FF2B5EF4-FFF2-40B4-BE49-F238E27FC236}">
-                <a16:creationId xmlns:a16="http://schemas.microsoft.com/office/drawing/2014/main" id="{B3858927-5E9E-E787-3BE0-2849C9A5C677}"/>
-              </a:ext>
-            </a:extLst>
-          </p:cNvPr>
-          <p:cNvPicPr>
-            <a:picLocks noChangeAspect="1"/>
-          </p:cNvPicPr>
-          <p:nvPr/>
-        </p:nvPicPr>
-        <p:blipFill>
-          <a:blip r:embed="rId6"/>
-          <a:stretch>
-            <a:fillRect/>
-          </a:stretch>
-        </p:blipFill>
-        <p:spPr>
-          <a:xfrm>
-            <a:off x="5254865" y="2278893"/>
-            <a:ext cx="4665190" cy="3403962"/>
-          </a:xfrm>
-          <a:prstGeom prst="rect">
-            <a:avLst/>
-          </a:prstGeom>
-        </p:spPr>
-      </p:pic>
-      <p:sp>
-        <p:nvSpPr>
-          <p:cNvPr id="19" name="正方形/長方形 18">
-            <a:extLst>
-              <a:ext uri="{FF2B5EF4-FFF2-40B4-BE49-F238E27FC236}">
-                <a16:creationId xmlns:a16="http://schemas.microsoft.com/office/drawing/2014/main" id="{D10550AA-C953-1294-7BEC-64C68A83351C}"/>
-              </a:ext>
-            </a:extLst>
-          </p:cNvPr>
-          <p:cNvSpPr/>
-          <p:nvPr/>
-        </p:nvSpPr>
-        <p:spPr>
-          <a:xfrm>
-            <a:off x="9971440" y="2544055"/>
-            <a:ext cx="1716442" cy="1334209"/>
-          </a:xfrm>
-          <a:prstGeom prst="rect">
-            <a:avLst/>
-          </a:prstGeom>
-          <a:noFill/>
-          <a:ln w="19050">
-            <a:solidFill>
-              <a:srgbClr val="1F78B4"/>
-            </a:solidFill>
-          </a:ln>
-        </p:spPr>
-        <p:style>
-          <a:lnRef idx="2">
-            <a:schemeClr val="accent1">
-              <a:shade val="15000"/>
-            </a:schemeClr>
-          </a:lnRef>
-          <a:fillRef idx="1">
-            <a:schemeClr val="accent1"/>
-          </a:fillRef>
-          <a:effectRef idx="0">
-            <a:schemeClr val="accent1"/>
-          </a:effectRef>
-          <a:fontRef idx="minor">
-            <a:schemeClr val="lt1"/>
-          </a:fontRef>
-        </p:style>
-        <p:txBody>
-          <a:bodyPr rtlCol="0" anchor="ctr"/>
-          <a:lstStyle/>
-          <a:p>
-            <a:pPr algn="ctr"/>
-            <a:endParaRPr lang="en-US" sz="1500" b="1"/>
-          </a:p>
-        </p:txBody>
-      </p:sp>
-      <p:pic>
-        <p:nvPicPr>
-          <p:cNvPr id="25" name="図 24">
-            <a:extLst>
-              <a:ext uri="{FF2B5EF4-FFF2-40B4-BE49-F238E27FC236}">
-                <a16:creationId xmlns:a16="http://schemas.microsoft.com/office/drawing/2014/main" id="{8A12AAE0-BA28-8EB8-423A-2DE7868B7335}"/>
-              </a:ext>
-            </a:extLst>
-          </p:cNvPr>
-          <p:cNvPicPr>
-            <a:picLocks noChangeAspect="1"/>
-          </p:cNvPicPr>
-          <p:nvPr/>
-        </p:nvPicPr>
-        <p:blipFill>
-          <a:blip r:embed="rId7"/>
-          <a:stretch>
-            <a:fillRect/>
-          </a:stretch>
-        </p:blipFill>
-        <p:spPr>
-          <a:xfrm>
-            <a:off x="4991649" y="144557"/>
-            <a:ext cx="2755631" cy="1853345"/>
-          </a:xfrm>
-          <a:prstGeom prst="rect">
-            <a:avLst/>
-          </a:prstGeom>
-        </p:spPr>
-      </p:pic>
-    </p:spTree>
-    <p:extLst>
-      <p:ext uri="{BB962C8B-B14F-4D97-AF65-F5344CB8AC3E}">
-        <p14:creationId xmlns:p14="http://schemas.microsoft.com/office/powerpoint/2010/main" val="2309657435"/>
       </p:ext>
     </p:extLst>
   </p:cSld>
@@ -5765,10 +4738,10 @@
       </p:grpSpPr>
       <p:pic>
         <p:nvPicPr>
-          <p:cNvPr id="4" name="図 3">
-            <a:extLst>
-              <a:ext uri="{FF2B5EF4-FFF2-40B4-BE49-F238E27FC236}">
-                <a16:creationId xmlns:a16="http://schemas.microsoft.com/office/drawing/2014/main" id="{3A649970-F01F-7AB6-C8B5-4A490893F760}"/>
+          <p:cNvPr id="3" name="図 2">
+            <a:extLst>
+              <a:ext uri="{FF2B5EF4-FFF2-40B4-BE49-F238E27FC236}">
+                <a16:creationId xmlns:a16="http://schemas.microsoft.com/office/drawing/2014/main" id="{65B07186-1E75-0794-13DC-65ED15C1999C}"/>
               </a:ext>
             </a:extLst>
           </p:cNvPr>
@@ -5779,21 +4752,246 @@
         </p:nvPicPr>
         <p:blipFill>
           <a:blip r:embed="rId2"/>
-          <a:srcRect l="1108" t="1949" r="879" b="1949"/>
           <a:stretch>
             <a:fillRect/>
           </a:stretch>
         </p:blipFill>
         <p:spPr>
           <a:xfrm>
-            <a:off x="1133060" y="1759226"/>
-            <a:ext cx="9949069" cy="3339548"/>
+            <a:off x="118368" y="1115232"/>
+            <a:ext cx="4724809" cy="3779848"/>
           </a:xfrm>
           <a:prstGeom prst="rect">
             <a:avLst/>
           </a:prstGeom>
         </p:spPr>
       </p:pic>
+      <p:pic>
+        <p:nvPicPr>
+          <p:cNvPr id="7" name="図 6">
+            <a:extLst>
+              <a:ext uri="{FF2B5EF4-FFF2-40B4-BE49-F238E27FC236}">
+                <a16:creationId xmlns:a16="http://schemas.microsoft.com/office/drawing/2014/main" id="{5343ABF0-BAE2-BE4F-4553-9489A8A80430}"/>
+              </a:ext>
+            </a:extLst>
+          </p:cNvPr>
+          <p:cNvPicPr>
+            <a:picLocks noChangeAspect="1"/>
+          </p:cNvPicPr>
+          <p:nvPr/>
+        </p:nvPicPr>
+        <p:blipFill>
+          <a:blip r:embed="rId3"/>
+          <a:stretch>
+            <a:fillRect/>
+          </a:stretch>
+        </p:blipFill>
+        <p:spPr>
+          <a:xfrm>
+            <a:off x="10124442" y="1417212"/>
+            <a:ext cx="1963082" cy="2926334"/>
+          </a:xfrm>
+          <a:prstGeom prst="rect">
+            <a:avLst/>
+          </a:prstGeom>
+        </p:spPr>
+      </p:pic>
+      <p:sp>
+        <p:nvSpPr>
+          <p:cNvPr id="8" name="テキスト ボックス 7">
+            <a:extLst>
+              <a:ext uri="{FF2B5EF4-FFF2-40B4-BE49-F238E27FC236}">
+                <a16:creationId xmlns:a16="http://schemas.microsoft.com/office/drawing/2014/main" id="{C61B1713-4553-9A78-9D70-DD61F2FC0623}"/>
+              </a:ext>
+            </a:extLst>
+          </p:cNvPr>
+          <p:cNvSpPr txBox="1"/>
+          <p:nvPr/>
+        </p:nvSpPr>
+        <p:spPr>
+          <a:xfrm>
+            <a:off x="0" y="1041572"/>
+            <a:ext cx="440960" cy="323165"/>
+          </a:xfrm>
+          <a:prstGeom prst="rect">
+            <a:avLst/>
+          </a:prstGeom>
+          <a:noFill/>
+        </p:spPr>
+        <p:txBody>
+          <a:bodyPr wrap="square" rtlCol="0">
+            <a:spAutoFit/>
+          </a:bodyPr>
+          <a:lstStyle/>
+          <a:p>
+            <a:r>
+              <a:rPr lang="en-US" sz="1500" b="1" dirty="0"/>
+              <a:t>(a)</a:t>
+            </a:r>
+          </a:p>
+        </p:txBody>
+      </p:sp>
+      <p:sp>
+        <p:nvSpPr>
+          <p:cNvPr id="9" name="テキスト ボックス 8">
+            <a:extLst>
+              <a:ext uri="{FF2B5EF4-FFF2-40B4-BE49-F238E27FC236}">
+                <a16:creationId xmlns:a16="http://schemas.microsoft.com/office/drawing/2014/main" id="{8D3469B6-CE67-D217-1AF0-9B26E3589ADE}"/>
+              </a:ext>
+            </a:extLst>
+          </p:cNvPr>
+          <p:cNvSpPr txBox="1"/>
+          <p:nvPr/>
+        </p:nvSpPr>
+        <p:spPr>
+          <a:xfrm>
+            <a:off x="5191527" y="1048118"/>
+            <a:ext cx="440960" cy="323165"/>
+          </a:xfrm>
+          <a:prstGeom prst="rect">
+            <a:avLst/>
+          </a:prstGeom>
+          <a:noFill/>
+        </p:spPr>
+        <p:txBody>
+          <a:bodyPr wrap="square" rtlCol="0">
+            <a:spAutoFit/>
+          </a:bodyPr>
+          <a:lstStyle/>
+          <a:p>
+            <a:r>
+              <a:rPr lang="en-US" sz="1500" b="1" dirty="0"/>
+              <a:t>(b)</a:t>
+            </a:r>
+          </a:p>
+        </p:txBody>
+      </p:sp>
+      <p:pic>
+        <p:nvPicPr>
+          <p:cNvPr id="12" name="図 11">
+            <a:extLst>
+              <a:ext uri="{FF2B5EF4-FFF2-40B4-BE49-F238E27FC236}">
+                <a16:creationId xmlns:a16="http://schemas.microsoft.com/office/drawing/2014/main" id="{820CD996-038A-A4B1-8F19-2672CA1D0DE5}"/>
+              </a:ext>
+            </a:extLst>
+          </p:cNvPr>
+          <p:cNvPicPr>
+            <a:picLocks noChangeAspect="1"/>
+          </p:cNvPicPr>
+          <p:nvPr/>
+        </p:nvPicPr>
+        <p:blipFill>
+          <a:blip r:embed="rId4"/>
+          <a:stretch>
+            <a:fillRect/>
+          </a:stretch>
+        </p:blipFill>
+        <p:spPr>
+          <a:xfrm>
+            <a:off x="5191527" y="1294563"/>
+            <a:ext cx="4882816" cy="3240000"/>
+          </a:xfrm>
+          <a:prstGeom prst="rect">
+            <a:avLst/>
+          </a:prstGeom>
+        </p:spPr>
+      </p:pic>
+    </p:spTree>
+    <p:extLst>
+      <p:ext uri="{BB962C8B-B14F-4D97-AF65-F5344CB8AC3E}">
+        <p14:creationId xmlns:p14="http://schemas.microsoft.com/office/powerpoint/2010/main" val="2768375805"/>
+      </p:ext>
+    </p:extLst>
+  </p:cSld>
+  <p:clrMapOvr>
+    <a:masterClrMapping/>
+  </p:clrMapOvr>
+</p:sld>
+</file>
+
+<file path=ppt/slides/slide4.xml><?xml version="1.0" encoding="utf-8"?>
+<p:sld xmlns:a="http://schemas.openxmlformats.org/drawingml/2006/main" xmlns:r="http://schemas.openxmlformats.org/officeDocument/2006/relationships" xmlns:p="http://schemas.openxmlformats.org/presentationml/2006/main">
+  <p:cSld>
+    <p:spTree>
+      <p:nvGrpSpPr>
+        <p:cNvPr id="1" name="">
+          <a:extLst>
+            <a:ext uri="{FF2B5EF4-FFF2-40B4-BE49-F238E27FC236}">
+              <a16:creationId xmlns:a16="http://schemas.microsoft.com/office/drawing/2014/main" id="{34B3B062-6C49-344E-84AB-48EEFED01FE4}"/>
+            </a:ext>
+          </a:extLst>
+        </p:cNvPr>
+        <p:cNvGrpSpPr/>
+        <p:nvPr/>
+      </p:nvGrpSpPr>
+      <p:grpSpPr>
+        <a:xfrm>
+          <a:off x="0" y="0"/>
+          <a:ext cx="0" cy="0"/>
+          <a:chOff x="0" y="0"/>
+          <a:chExt cx="0" cy="0"/>
+        </a:xfrm>
+      </p:grpSpPr>
+      <p:pic>
+        <p:nvPicPr>
+          <p:cNvPr id="20" name="図 19">
+            <a:extLst>
+              <a:ext uri="{FF2B5EF4-FFF2-40B4-BE49-F238E27FC236}">
+                <a16:creationId xmlns:a16="http://schemas.microsoft.com/office/drawing/2014/main" id="{74204807-F0B4-4E40-021E-D915ACFAFE7D}"/>
+              </a:ext>
+            </a:extLst>
+          </p:cNvPr>
+          <p:cNvPicPr>
+            <a:picLocks noChangeAspect="1"/>
+          </p:cNvPicPr>
+          <p:nvPr/>
+        </p:nvPicPr>
+        <p:blipFill>
+          <a:blip r:embed="rId2"/>
+          <a:stretch>
+            <a:fillRect/>
+          </a:stretch>
+        </p:blipFill>
+        <p:spPr>
+          <a:xfrm>
+            <a:off x="-85458" y="1110277"/>
+            <a:ext cx="12113802" cy="3859102"/>
+          </a:xfrm>
+          <a:prstGeom prst="rect">
+            <a:avLst/>
+          </a:prstGeom>
+        </p:spPr>
+      </p:pic>
+    </p:spTree>
+    <p:extLst>
+      <p:ext uri="{BB962C8B-B14F-4D97-AF65-F5344CB8AC3E}">
+        <p14:creationId xmlns:p14="http://schemas.microsoft.com/office/powerpoint/2010/main" val="2309657435"/>
+      </p:ext>
+    </p:extLst>
+  </p:cSld>
+  <p:clrMapOvr>
+    <a:masterClrMapping/>
+  </p:clrMapOvr>
+</p:sld>
+</file>
+
+<file path=ppt/slides/slide5.xml><?xml version="1.0" encoding="utf-8"?>
+<p:sld xmlns:a="http://schemas.openxmlformats.org/drawingml/2006/main" xmlns:r="http://schemas.openxmlformats.org/officeDocument/2006/relationships" xmlns:p="http://schemas.openxmlformats.org/presentationml/2006/main">
+  <p:cSld>
+    <p:spTree>
+      <p:nvGrpSpPr>
+        <p:cNvPr id="1" name=""/>
+        <p:cNvGrpSpPr/>
+        <p:nvPr/>
+      </p:nvGrpSpPr>
+      <p:grpSpPr>
+        <a:xfrm>
+          <a:off x="0" y="0"/>
+          <a:ext cx="0" cy="0"/>
+          <a:chOff x="0" y="0"/>
+          <a:chExt cx="0" cy="0"/>
+        </a:xfrm>
+      </p:grpSpPr>
     </p:spTree>
     <p:extLst>
       <p:ext uri="{BB962C8B-B14F-4D97-AF65-F5344CB8AC3E}">

--- a/tics.pptx
+++ b/tics.pptx
@@ -265,7 +265,7 @@
           <a:p>
             <a:fld id="{B8AD9B42-5818-4541-9667-91B0E0B30851}" type="datetimeFigureOut">
               <a:rPr lang="en-US" smtClean="0"/>
-              <a:t>3/26/2026</a:t>
+              <a:t>3/27/2026</a:t>
             </a:fld>
             <a:endParaRPr lang="en-US"/>
           </a:p>
@@ -497,7 +497,7 @@
           <a:p>
             <a:fld id="{B8AD9B42-5818-4541-9667-91B0E0B30851}" type="datetimeFigureOut">
               <a:rPr lang="en-US" smtClean="0"/>
-              <a:t>3/26/2026</a:t>
+              <a:t>3/27/2026</a:t>
             </a:fld>
             <a:endParaRPr lang="en-US"/>
           </a:p>
@@ -739,7 +739,7 @@
           <a:p>
             <a:fld id="{B8AD9B42-5818-4541-9667-91B0E0B30851}" type="datetimeFigureOut">
               <a:rPr lang="en-US" smtClean="0"/>
-              <a:t>3/26/2026</a:t>
+              <a:t>3/27/2026</a:t>
             </a:fld>
             <a:endParaRPr lang="en-US"/>
           </a:p>
@@ -971,7 +971,7 @@
           <a:p>
             <a:fld id="{B8AD9B42-5818-4541-9667-91B0E0B30851}" type="datetimeFigureOut">
               <a:rPr lang="en-US" smtClean="0"/>
-              <a:t>3/26/2026</a:t>
+              <a:t>3/27/2026</a:t>
             </a:fld>
             <a:endParaRPr lang="en-US"/>
           </a:p>
@@ -1247,7 +1247,7 @@
           <a:p>
             <a:fld id="{B8AD9B42-5818-4541-9667-91B0E0B30851}" type="datetimeFigureOut">
               <a:rPr lang="en-US" smtClean="0"/>
-              <a:t>3/26/2026</a:t>
+              <a:t>3/27/2026</a:t>
             </a:fld>
             <a:endParaRPr lang="en-US"/>
           </a:p>
@@ -1579,7 +1579,7 @@
           <a:p>
             <a:fld id="{B8AD9B42-5818-4541-9667-91B0E0B30851}" type="datetimeFigureOut">
               <a:rPr lang="en-US" smtClean="0"/>
-              <a:t>3/26/2026</a:t>
+              <a:t>3/27/2026</a:t>
             </a:fld>
             <a:endParaRPr lang="en-US"/>
           </a:p>
@@ -2058,7 +2058,7 @@
           <a:p>
             <a:fld id="{B8AD9B42-5818-4541-9667-91B0E0B30851}" type="datetimeFigureOut">
               <a:rPr lang="en-US" smtClean="0"/>
-              <a:t>3/26/2026</a:t>
+              <a:t>3/27/2026</a:t>
             </a:fld>
             <a:endParaRPr lang="en-US"/>
           </a:p>
@@ -2200,7 +2200,7 @@
           <a:p>
             <a:fld id="{B8AD9B42-5818-4541-9667-91B0E0B30851}" type="datetimeFigureOut">
               <a:rPr lang="en-US" smtClean="0"/>
-              <a:t>3/26/2026</a:t>
+              <a:t>3/27/2026</a:t>
             </a:fld>
             <a:endParaRPr lang="en-US"/>
           </a:p>
@@ -2313,7 +2313,7 @@
           <a:p>
             <a:fld id="{B8AD9B42-5818-4541-9667-91B0E0B30851}" type="datetimeFigureOut">
               <a:rPr lang="en-US" smtClean="0"/>
-              <a:t>3/26/2026</a:t>
+              <a:t>3/27/2026</a:t>
             </a:fld>
             <a:endParaRPr lang="en-US"/>
           </a:p>
@@ -2658,7 +2658,7 @@
           <a:p>
             <a:fld id="{B8AD9B42-5818-4541-9667-91B0E0B30851}" type="datetimeFigureOut">
               <a:rPr lang="en-US" smtClean="0"/>
-              <a:t>3/26/2026</a:t>
+              <a:t>3/27/2026</a:t>
             </a:fld>
             <a:endParaRPr lang="en-US"/>
           </a:p>
@@ -2947,7 +2947,7 @@
           <a:p>
             <a:fld id="{B8AD9B42-5818-4541-9667-91B0E0B30851}" type="datetimeFigureOut">
               <a:rPr lang="en-US" smtClean="0"/>
-              <a:t>3/26/2026</a:t>
+              <a:t>3/27/2026</a:t>
             </a:fld>
             <a:endParaRPr lang="en-US"/>
           </a:p>
@@ -3222,7 +3222,7 @@
           <a:p>
             <a:fld id="{B8AD9B42-5818-4541-9667-91B0E0B30851}" type="datetimeFigureOut">
               <a:rPr lang="en-US" smtClean="0"/>
-              <a:t>3/26/2026</a:t>
+              <a:t>3/27/2026</a:t>
             </a:fld>
             <a:endParaRPr lang="en-US"/>
           </a:p>
@@ -4992,6 +4992,635 @@
           <a:chExt cx="0" cy="0"/>
         </a:xfrm>
       </p:grpSpPr>
+      <p:pic>
+        <p:nvPicPr>
+          <p:cNvPr id="1026" name="Picture 2">
+            <a:extLst>
+              <a:ext uri="{FF2B5EF4-FFF2-40B4-BE49-F238E27FC236}">
+                <a16:creationId xmlns:a16="http://schemas.microsoft.com/office/drawing/2014/main" id="{2AA5B46C-3EFB-77B5-C3F9-C7172E5D53DF}"/>
+              </a:ext>
+            </a:extLst>
+          </p:cNvPr>
+          <p:cNvPicPr>
+            <a:picLocks noChangeAspect="1" noChangeArrowheads="1"/>
+          </p:cNvPicPr>
+          <p:nvPr/>
+        </p:nvPicPr>
+        <p:blipFill>
+          <a:blip r:embed="rId2">
+            <a:extLst>
+              <a:ext uri="{28A0092B-C50C-407E-A947-70E740481C1C}">
+                <a14:useLocalDpi xmlns:a14="http://schemas.microsoft.com/office/drawing/2010/main" val="0"/>
+              </a:ext>
+            </a:extLst>
+          </a:blip>
+          <a:srcRect/>
+          <a:stretch>
+            <a:fillRect/>
+          </a:stretch>
+        </p:blipFill>
+        <p:spPr bwMode="auto">
+          <a:xfrm>
+            <a:off x="9628947" y="4385849"/>
+            <a:ext cx="2162175" cy="1724025"/>
+          </a:xfrm>
+          <a:prstGeom prst="rect">
+            <a:avLst/>
+          </a:prstGeom>
+          <a:noFill/>
+          <a:extLst>
+            <a:ext uri="{909E8E84-426E-40DD-AFC4-6F175D3DCCD1}">
+              <a14:hiddenFill xmlns:a14="http://schemas.microsoft.com/office/drawing/2010/main">
+                <a:solidFill>
+                  <a:srgbClr val="FFFFFF"/>
+                </a:solidFill>
+              </a14:hiddenFill>
+            </a:ext>
+          </a:extLst>
+        </p:spPr>
+      </p:pic>
+      <p:pic>
+        <p:nvPicPr>
+          <p:cNvPr id="9" name="図 8">
+            <a:extLst>
+              <a:ext uri="{FF2B5EF4-FFF2-40B4-BE49-F238E27FC236}">
+                <a16:creationId xmlns:a16="http://schemas.microsoft.com/office/drawing/2014/main" id="{3F89E1B9-D384-2CC4-D873-642B21BD5DE0}"/>
+              </a:ext>
+            </a:extLst>
+          </p:cNvPr>
+          <p:cNvPicPr>
+            <a:picLocks noChangeAspect="1"/>
+          </p:cNvPicPr>
+          <p:nvPr/>
+        </p:nvPicPr>
+        <p:blipFill>
+          <a:blip r:embed="rId3">
+            <a:extLst>
+              <a:ext uri="{28A0092B-C50C-407E-A947-70E740481C1C}">
+                <a14:useLocalDpi xmlns:a14="http://schemas.microsoft.com/office/drawing/2010/main" val="0"/>
+              </a:ext>
+            </a:extLst>
+          </a:blip>
+          <a:srcRect l="10030" t="60362" r="1533" b="939"/>
+          <a:stretch>
+            <a:fillRect/>
+          </a:stretch>
+        </p:blipFill>
+        <p:spPr>
+          <a:xfrm>
+            <a:off x="8310" y="935718"/>
+            <a:ext cx="3965714" cy="1818860"/>
+          </a:xfrm>
+          <a:prstGeom prst="rect">
+            <a:avLst/>
+          </a:prstGeom>
+        </p:spPr>
+      </p:pic>
+      <p:sp>
+        <p:nvSpPr>
+          <p:cNvPr id="13" name="テキスト ボックス 12">
+            <a:extLst>
+              <a:ext uri="{FF2B5EF4-FFF2-40B4-BE49-F238E27FC236}">
+                <a16:creationId xmlns:a16="http://schemas.microsoft.com/office/drawing/2014/main" id="{43B0653D-7A9D-8892-835C-0DC02FBF65DE}"/>
+              </a:ext>
+            </a:extLst>
+          </p:cNvPr>
+          <p:cNvSpPr txBox="1"/>
+          <p:nvPr/>
+        </p:nvSpPr>
+        <p:spPr>
+          <a:xfrm>
+            <a:off x="0" y="2136"/>
+            <a:ext cx="12192000" cy="338554"/>
+          </a:xfrm>
+          <a:prstGeom prst="rect">
+            <a:avLst/>
+          </a:prstGeom>
+          <a:noFill/>
+        </p:spPr>
+        <p:txBody>
+          <a:bodyPr wrap="square" rtlCol="0">
+            <a:spAutoFit/>
+          </a:bodyPr>
+          <a:lstStyle/>
+          <a:p>
+            <a:pPr algn="ctr"/>
+            <a:r>
+              <a:rPr lang="en-US" altLang="ja-JP" sz="1600" b="1" dirty="0">
+                <a:latin typeface="Arial]"/>
+              </a:rPr>
+              <a:t>Pre-stimulus</a:t>
+            </a:r>
+            <a:r>
+              <a:rPr lang="ja-JP" altLang="en-US" sz="1600" b="1" dirty="0">
+                <a:latin typeface="Arial]"/>
+              </a:rPr>
+              <a:t> </a:t>
+            </a:r>
+            <a:r>
+              <a:rPr lang="en-US" altLang="ja-JP" sz="1600" b="1" dirty="0">
+                <a:latin typeface="Arial]"/>
+              </a:rPr>
+              <a:t>EEG α power (proxy for baseline neural excitability) predicts visual awareness but not perceptual sensitivity</a:t>
+            </a:r>
+          </a:p>
+        </p:txBody>
+      </p:sp>
+      <p:sp>
+        <p:nvSpPr>
+          <p:cNvPr id="15" name="テキスト ボックス 14">
+            <a:extLst>
+              <a:ext uri="{FF2B5EF4-FFF2-40B4-BE49-F238E27FC236}">
+                <a16:creationId xmlns:a16="http://schemas.microsoft.com/office/drawing/2014/main" id="{2A2F7BD3-5FFF-2C69-07D6-0274E919B954}"/>
+              </a:ext>
+            </a:extLst>
+          </p:cNvPr>
+          <p:cNvSpPr txBox="1"/>
+          <p:nvPr/>
+        </p:nvSpPr>
+        <p:spPr>
+          <a:xfrm>
+            <a:off x="16856" y="571404"/>
+            <a:ext cx="3965714" cy="307777"/>
+          </a:xfrm>
+          <a:prstGeom prst="rect">
+            <a:avLst/>
+          </a:prstGeom>
+          <a:noFill/>
+        </p:spPr>
+        <p:txBody>
+          <a:bodyPr wrap="square" rtlCol="0">
+            <a:spAutoFit/>
+          </a:bodyPr>
+          <a:lstStyle/>
+          <a:p>
+            <a:pPr algn="ctr"/>
+            <a:r>
+              <a:rPr lang="en-US" sz="1400" dirty="0">
+                <a:latin typeface="Arial" panose="020B0604020202020204" pitchFamily="34" charset="0"/>
+                <a:cs typeface="Arial" panose="020B0604020202020204" pitchFamily="34" charset="0"/>
+              </a:rPr>
+              <a:t>CW vs. CCW discrimination with visibility rating</a:t>
+            </a:r>
+          </a:p>
+        </p:txBody>
+      </p:sp>
+      <p:sp>
+        <p:nvSpPr>
+          <p:cNvPr id="30" name="テキスト ボックス 29">
+            <a:extLst>
+              <a:ext uri="{FF2B5EF4-FFF2-40B4-BE49-F238E27FC236}">
+                <a16:creationId xmlns:a16="http://schemas.microsoft.com/office/drawing/2014/main" id="{7EEFB507-DDA3-248D-E90C-389CF2D3A1EC}"/>
+              </a:ext>
+            </a:extLst>
+          </p:cNvPr>
+          <p:cNvSpPr txBox="1"/>
+          <p:nvPr/>
+        </p:nvSpPr>
+        <p:spPr>
+          <a:xfrm>
+            <a:off x="11416157" y="446405"/>
+            <a:ext cx="757776" cy="323165"/>
+          </a:xfrm>
+          <a:prstGeom prst="rect">
+            <a:avLst/>
+          </a:prstGeom>
+          <a:noFill/>
+        </p:spPr>
+        <p:txBody>
+          <a:bodyPr wrap="square" rtlCol="0">
+            <a:spAutoFit/>
+          </a:bodyPr>
+          <a:lstStyle/>
+          <a:p>
+            <a:r>
+              <a:rPr lang="en-US" altLang="ja-JP" sz="1500" b="1" dirty="0"/>
+              <a:t>High α</a:t>
+            </a:r>
+            <a:endParaRPr lang="en-US" sz="1500" b="1" dirty="0"/>
+          </a:p>
+        </p:txBody>
+      </p:sp>
+      <p:sp>
+        <p:nvSpPr>
+          <p:cNvPr id="31" name="テキスト ボックス 30">
+            <a:extLst>
+              <a:ext uri="{FF2B5EF4-FFF2-40B4-BE49-F238E27FC236}">
+                <a16:creationId xmlns:a16="http://schemas.microsoft.com/office/drawing/2014/main" id="{1EB25904-B727-74EA-1E68-57575D494267}"/>
+              </a:ext>
+            </a:extLst>
+          </p:cNvPr>
+          <p:cNvSpPr txBox="1"/>
+          <p:nvPr/>
+        </p:nvSpPr>
+        <p:spPr>
+          <a:xfrm>
+            <a:off x="11030476" y="462607"/>
+            <a:ext cx="771362" cy="323165"/>
+          </a:xfrm>
+          <a:prstGeom prst="rect">
+            <a:avLst/>
+          </a:prstGeom>
+          <a:noFill/>
+        </p:spPr>
+        <p:txBody>
+          <a:bodyPr wrap="square" rtlCol="0">
+            <a:spAutoFit/>
+          </a:bodyPr>
+          <a:lstStyle/>
+          <a:p>
+            <a:r>
+              <a:rPr lang="ja-JP" altLang="en-US" sz="1500" b="1" dirty="0">
+                <a:solidFill>
+                  <a:srgbClr val="E41A1C"/>
+                </a:solidFill>
+              </a:rPr>
+              <a:t>●</a:t>
+            </a:r>
+            <a:r>
+              <a:rPr lang="ja-JP" altLang="en-US" sz="1500" b="1" dirty="0">
+                <a:solidFill>
+                  <a:srgbClr val="1F78B4"/>
+                </a:solidFill>
+              </a:rPr>
+              <a:t> </a:t>
+            </a:r>
+            <a:r>
+              <a:rPr lang="en-US" altLang="ja-JP" sz="1500" b="1" dirty="0">
+                <a:solidFill>
+                  <a:srgbClr val="E41A1C"/>
+                </a:solidFill>
+              </a:rPr>
+              <a:t>+</a:t>
+            </a:r>
+            <a:endParaRPr lang="en-US" sz="1500" b="1" dirty="0">
+              <a:solidFill>
+                <a:srgbClr val="E41A1C"/>
+              </a:solidFill>
+            </a:endParaRPr>
+          </a:p>
+        </p:txBody>
+      </p:sp>
+      <p:sp>
+        <p:nvSpPr>
+          <p:cNvPr id="32" name="正方形/長方形 31">
+            <a:extLst>
+              <a:ext uri="{FF2B5EF4-FFF2-40B4-BE49-F238E27FC236}">
+                <a16:creationId xmlns:a16="http://schemas.microsoft.com/office/drawing/2014/main" id="{08C343E2-93CE-8EF7-689F-BC096B73673E}"/>
+              </a:ext>
+            </a:extLst>
+          </p:cNvPr>
+          <p:cNvSpPr/>
+          <p:nvPr/>
+        </p:nvSpPr>
+        <p:spPr>
+          <a:xfrm>
+            <a:off x="11016608" y="446411"/>
+            <a:ext cx="1157325" cy="323159"/>
+          </a:xfrm>
+          <a:prstGeom prst="rect">
+            <a:avLst/>
+          </a:prstGeom>
+          <a:noFill/>
+          <a:ln w="19050">
+            <a:solidFill>
+              <a:srgbClr val="E41A1C"/>
+            </a:solidFill>
+          </a:ln>
+        </p:spPr>
+        <p:style>
+          <a:lnRef idx="2">
+            <a:schemeClr val="accent1">
+              <a:shade val="15000"/>
+            </a:schemeClr>
+          </a:lnRef>
+          <a:fillRef idx="1">
+            <a:schemeClr val="accent1"/>
+          </a:fillRef>
+          <a:effectRef idx="0">
+            <a:schemeClr val="accent1"/>
+          </a:effectRef>
+          <a:fontRef idx="minor">
+            <a:schemeClr val="lt1"/>
+          </a:fontRef>
+        </p:style>
+        <p:txBody>
+          <a:bodyPr rtlCol="0" anchor="ctr"/>
+          <a:lstStyle/>
+          <a:p>
+            <a:pPr algn="ctr"/>
+            <a:endParaRPr lang="en-US" sz="1500" b="1"/>
+          </a:p>
+        </p:txBody>
+      </p:sp>
+      <p:pic>
+        <p:nvPicPr>
+          <p:cNvPr id="3" name="図 2">
+            <a:extLst>
+              <a:ext uri="{FF2B5EF4-FFF2-40B4-BE49-F238E27FC236}">
+                <a16:creationId xmlns:a16="http://schemas.microsoft.com/office/drawing/2014/main" id="{CEC5CA34-88D0-89E1-8CB8-7854A470DC8E}"/>
+              </a:ext>
+            </a:extLst>
+          </p:cNvPr>
+          <p:cNvPicPr>
+            <a:picLocks noChangeAspect="1"/>
+          </p:cNvPicPr>
+          <p:nvPr/>
+        </p:nvPicPr>
+        <p:blipFill>
+          <a:blip r:embed="rId4">
+            <a:extLst>
+              <a:ext uri="{28A0092B-C50C-407E-A947-70E740481C1C}">
+                <a14:useLocalDpi xmlns:a14="http://schemas.microsoft.com/office/drawing/2010/main" val="0"/>
+              </a:ext>
+            </a:extLst>
+          </a:blip>
+          <a:srcRect l="16691" t="36377" r="45468" b="20724"/>
+          <a:stretch>
+            <a:fillRect/>
+          </a:stretch>
+        </p:blipFill>
+        <p:spPr>
+          <a:xfrm>
+            <a:off x="5980779" y="316196"/>
+            <a:ext cx="3707297" cy="2941982"/>
+          </a:xfrm>
+          <a:prstGeom prst="rect">
+            <a:avLst/>
+          </a:prstGeom>
+        </p:spPr>
+      </p:pic>
+      <p:sp>
+        <p:nvSpPr>
+          <p:cNvPr id="17" name="テキスト ボックス 16">
+            <a:extLst>
+              <a:ext uri="{FF2B5EF4-FFF2-40B4-BE49-F238E27FC236}">
+                <a16:creationId xmlns:a16="http://schemas.microsoft.com/office/drawing/2014/main" id="{7D938971-CFA2-846B-7326-07B1B2AEE864}"/>
+              </a:ext>
+            </a:extLst>
+          </p:cNvPr>
+          <p:cNvSpPr txBox="1"/>
+          <p:nvPr/>
+        </p:nvSpPr>
+        <p:spPr>
+          <a:xfrm>
+            <a:off x="9802026" y="1021731"/>
+            <a:ext cx="2404212" cy="1846659"/>
+          </a:xfrm>
+          <a:prstGeom prst="rect">
+            <a:avLst/>
+          </a:prstGeom>
+          <a:noFill/>
+        </p:spPr>
+        <p:txBody>
+          <a:bodyPr wrap="square">
+            <a:spAutoFit/>
+          </a:bodyPr>
+          <a:lstStyle/>
+          <a:p>
+            <a:r>
+              <a:rPr lang="en-US" altLang="ja-JP" sz="1300" b="1" dirty="0">
+                <a:latin typeface="Ariel"/>
+                <a:cs typeface="Arial" panose="020B0604020202020204" pitchFamily="34" charset="0"/>
+              </a:rPr>
+              <a:t>More points exceed the orange visibility plane under low α</a:t>
+            </a:r>
+          </a:p>
+          <a:p>
+            <a:endParaRPr lang="en-US" altLang="ja-JP" sz="500" b="1" dirty="0">
+              <a:latin typeface="Ariel"/>
+              <a:cs typeface="Arial" panose="020B0604020202020204" pitchFamily="34" charset="0"/>
+            </a:endParaRPr>
+          </a:p>
+          <a:p>
+            <a:r>
+              <a:rPr lang="en-US" sz="1300" b="1" dirty="0">
+                <a:latin typeface="Ariel"/>
+              </a:rPr>
+              <a:t>Awareness is determined along the dimension separate from sensitivity </a:t>
+            </a:r>
+            <a:endParaRPr lang="en-US" altLang="ja-JP" sz="1300" b="1" dirty="0">
+              <a:latin typeface="Ariel"/>
+              <a:cs typeface="Arial" panose="020B0604020202020204" pitchFamily="34" charset="0"/>
+            </a:endParaRPr>
+          </a:p>
+          <a:p>
+            <a:endParaRPr lang="en-US" sz="500" b="1" dirty="0">
+              <a:latin typeface="Ariel"/>
+            </a:endParaRPr>
+          </a:p>
+          <a:p>
+            <a:r>
+              <a:rPr lang="en-US" sz="1300" b="1" dirty="0">
+                <a:latin typeface="Ariel"/>
+              </a:rPr>
+              <a:t>This explains how strong phenomenology can arise decoupled from sensitivity</a:t>
+            </a:r>
+            <a:endParaRPr lang="en-US" sz="1300" b="1" dirty="0">
+              <a:latin typeface="Ariel"/>
+              <a:cs typeface="Arial" panose="020B0604020202020204" pitchFamily="34" charset="0"/>
+            </a:endParaRPr>
+          </a:p>
+        </p:txBody>
+      </p:sp>
+      <p:pic>
+        <p:nvPicPr>
+          <p:cNvPr id="33" name="図 32">
+            <a:extLst>
+              <a:ext uri="{FF2B5EF4-FFF2-40B4-BE49-F238E27FC236}">
+                <a16:creationId xmlns:a16="http://schemas.microsoft.com/office/drawing/2014/main" id="{DF2E97B8-6C54-5005-1D55-D297F3AB4EA4}"/>
+              </a:ext>
+            </a:extLst>
+          </p:cNvPr>
+          <p:cNvPicPr>
+            <a:picLocks noChangeAspect="1"/>
+          </p:cNvPicPr>
+          <p:nvPr/>
+        </p:nvPicPr>
+        <p:blipFill>
+          <a:blip r:embed="rId5"/>
+          <a:srcRect b="58300"/>
+          <a:stretch>
+            <a:fillRect/>
+          </a:stretch>
+        </p:blipFill>
+        <p:spPr>
+          <a:xfrm>
+            <a:off x="4024680" y="316196"/>
+            <a:ext cx="1994909" cy="1331007"/>
+          </a:xfrm>
+          <a:prstGeom prst="rect">
+            <a:avLst/>
+          </a:prstGeom>
+        </p:spPr>
+      </p:pic>
+      <p:pic>
+        <p:nvPicPr>
+          <p:cNvPr id="34" name="図 33">
+            <a:extLst>
+              <a:ext uri="{FF2B5EF4-FFF2-40B4-BE49-F238E27FC236}">
+                <a16:creationId xmlns:a16="http://schemas.microsoft.com/office/drawing/2014/main" id="{2A92BFEC-E3E1-C9FF-DAF7-5FBD895DDCFE}"/>
+              </a:ext>
+            </a:extLst>
+          </p:cNvPr>
+          <p:cNvPicPr>
+            <a:picLocks noChangeAspect="1"/>
+          </p:cNvPicPr>
+          <p:nvPr/>
+        </p:nvPicPr>
+        <p:blipFill>
+          <a:blip r:embed="rId5"/>
+          <a:srcRect t="49399"/>
+          <a:stretch>
+            <a:fillRect/>
+          </a:stretch>
+        </p:blipFill>
+        <p:spPr>
+          <a:xfrm>
+            <a:off x="4024679" y="1689234"/>
+            <a:ext cx="1994909" cy="1615110"/>
+          </a:xfrm>
+          <a:prstGeom prst="rect">
+            <a:avLst/>
+          </a:prstGeom>
+        </p:spPr>
+      </p:pic>
+      <p:sp>
+        <p:nvSpPr>
+          <p:cNvPr id="23" name="テキスト ボックス 22">
+            <a:extLst>
+              <a:ext uri="{FF2B5EF4-FFF2-40B4-BE49-F238E27FC236}">
+                <a16:creationId xmlns:a16="http://schemas.microsoft.com/office/drawing/2014/main" id="{B56D7787-E3B7-A20A-7547-5D821051FCD2}"/>
+              </a:ext>
+            </a:extLst>
+          </p:cNvPr>
+          <p:cNvSpPr txBox="1"/>
+          <p:nvPr/>
+        </p:nvSpPr>
+        <p:spPr>
+          <a:xfrm>
+            <a:off x="10112989" y="446405"/>
+            <a:ext cx="761699" cy="323165"/>
+          </a:xfrm>
+          <a:prstGeom prst="rect">
+            <a:avLst/>
+          </a:prstGeom>
+          <a:noFill/>
+        </p:spPr>
+        <p:txBody>
+          <a:bodyPr wrap="square" rtlCol="0">
+            <a:spAutoFit/>
+          </a:bodyPr>
+          <a:lstStyle/>
+          <a:p>
+            <a:r>
+              <a:rPr lang="en-US" altLang="ja-JP" sz="1500" b="1" dirty="0"/>
+              <a:t>Low α</a:t>
+            </a:r>
+            <a:endParaRPr lang="en-US" sz="1500" b="1" dirty="0"/>
+          </a:p>
+        </p:txBody>
+      </p:sp>
+      <p:sp>
+        <p:nvSpPr>
+          <p:cNvPr id="25" name="テキスト ボックス 24">
+            <a:extLst>
+              <a:ext uri="{FF2B5EF4-FFF2-40B4-BE49-F238E27FC236}">
+                <a16:creationId xmlns:a16="http://schemas.microsoft.com/office/drawing/2014/main" id="{94587E2E-0F0F-E9FF-ABFE-84BC45CCE63E}"/>
+              </a:ext>
+            </a:extLst>
+          </p:cNvPr>
+          <p:cNvSpPr txBox="1"/>
+          <p:nvPr/>
+        </p:nvSpPr>
+        <p:spPr>
+          <a:xfrm>
+            <a:off x="9727308" y="462607"/>
+            <a:ext cx="771362" cy="323165"/>
+          </a:xfrm>
+          <a:prstGeom prst="rect">
+            <a:avLst/>
+          </a:prstGeom>
+          <a:noFill/>
+        </p:spPr>
+        <p:txBody>
+          <a:bodyPr wrap="square" rtlCol="0">
+            <a:spAutoFit/>
+          </a:bodyPr>
+          <a:lstStyle/>
+          <a:p>
+            <a:r>
+              <a:rPr lang="ja-JP" altLang="en-US" sz="1500" b="1" dirty="0">
+                <a:solidFill>
+                  <a:srgbClr val="1F78B4"/>
+                </a:solidFill>
+              </a:rPr>
+              <a:t>● </a:t>
+            </a:r>
+            <a:r>
+              <a:rPr lang="en-US" altLang="ja-JP" sz="1500" b="1" dirty="0">
+                <a:solidFill>
+                  <a:srgbClr val="1F78B4"/>
+                </a:solidFill>
+              </a:rPr>
+              <a:t>+</a:t>
+            </a:r>
+            <a:endParaRPr lang="en-US" sz="1500" b="1" dirty="0"/>
+          </a:p>
+        </p:txBody>
+      </p:sp>
+      <p:sp>
+        <p:nvSpPr>
+          <p:cNvPr id="29" name="正方形/長方形 28">
+            <a:extLst>
+              <a:ext uri="{FF2B5EF4-FFF2-40B4-BE49-F238E27FC236}">
+                <a16:creationId xmlns:a16="http://schemas.microsoft.com/office/drawing/2014/main" id="{5D44F8E9-8CA1-13E0-DDC1-2AA03CA4FEE7}"/>
+              </a:ext>
+            </a:extLst>
+          </p:cNvPr>
+          <p:cNvSpPr/>
+          <p:nvPr/>
+        </p:nvSpPr>
+        <p:spPr>
+          <a:xfrm>
+            <a:off x="9713440" y="446411"/>
+            <a:ext cx="1157325" cy="323159"/>
+          </a:xfrm>
+          <a:prstGeom prst="rect">
+            <a:avLst/>
+          </a:prstGeom>
+          <a:noFill/>
+          <a:ln w="19050">
+            <a:solidFill>
+              <a:srgbClr val="1F78B4"/>
+            </a:solidFill>
+          </a:ln>
+        </p:spPr>
+        <p:style>
+          <a:lnRef idx="2">
+            <a:schemeClr val="accent1">
+              <a:shade val="15000"/>
+            </a:schemeClr>
+          </a:lnRef>
+          <a:fillRef idx="1">
+            <a:schemeClr val="accent1"/>
+          </a:fillRef>
+          <a:effectRef idx="0">
+            <a:schemeClr val="accent1"/>
+          </a:effectRef>
+          <a:fontRef idx="minor">
+            <a:schemeClr val="lt1"/>
+          </a:fontRef>
+        </p:style>
+        <p:txBody>
+          <a:bodyPr rtlCol="0" anchor="ctr"/>
+          <a:lstStyle/>
+          <a:p>
+            <a:pPr algn="ctr"/>
+            <a:endParaRPr lang="en-US" sz="1500" b="1"/>
+          </a:p>
+        </p:txBody>
+      </p:sp>
     </p:spTree>
     <p:extLst>
       <p:ext uri="{BB962C8B-B14F-4D97-AF65-F5344CB8AC3E}">
